--- a/notes/06-char-string.pptx
+++ b/notes/06-char-string.pptx
@@ -273,7 +273,7 @@
           <a:p>
             <a:fld id="{A74E6D30-F667-6B40-A3A3-6FED85F0F940}" type="datetimeFigureOut">
               <a:rPr lang="en-US" smtClean="0"/>
-              <a:t>9/27/21</a:t>
+              <a:t>9/28/26</a:t>
             </a:fld>
             <a:endParaRPr lang="en-US"/>
           </a:p>
@@ -971,7 +971,7 @@
           <a:p>
             <a:fld id="{6F998A3A-B3F1-C640-8709-1356562CC12B}" type="datetimeFigureOut">
               <a:rPr lang="en-US" smtClean="0"/>
-              <a:t>9/27/21</a:t>
+              <a:t>9/28/26</a:t>
             </a:fld>
             <a:endParaRPr lang="en-US"/>
           </a:p>
@@ -1139,7 +1139,7 @@
           <a:p>
             <a:fld id="{6F998A3A-B3F1-C640-8709-1356562CC12B}" type="datetimeFigureOut">
               <a:rPr lang="en-US" smtClean="0"/>
-              <a:t>9/27/21</a:t>
+              <a:t>9/28/26</a:t>
             </a:fld>
             <a:endParaRPr lang="en-US"/>
           </a:p>
@@ -1317,7 +1317,7 @@
           <a:p>
             <a:fld id="{6F998A3A-B3F1-C640-8709-1356562CC12B}" type="datetimeFigureOut">
               <a:rPr lang="en-US" smtClean="0"/>
-              <a:t>9/27/21</a:t>
+              <a:t>9/28/26</a:t>
             </a:fld>
             <a:endParaRPr lang="en-US"/>
           </a:p>
@@ -1485,7 +1485,7 @@
           <a:p>
             <a:fld id="{6F998A3A-B3F1-C640-8709-1356562CC12B}" type="datetimeFigureOut">
               <a:rPr lang="en-US" smtClean="0"/>
-              <a:t>9/27/21</a:t>
+              <a:t>9/28/26</a:t>
             </a:fld>
             <a:endParaRPr lang="en-US"/>
           </a:p>
@@ -1730,7 +1730,7 @@
           <a:p>
             <a:fld id="{6F998A3A-B3F1-C640-8709-1356562CC12B}" type="datetimeFigureOut">
               <a:rPr lang="en-US" smtClean="0"/>
-              <a:t>9/27/21</a:t>
+              <a:t>9/28/26</a:t>
             </a:fld>
             <a:endParaRPr lang="en-US"/>
           </a:p>
@@ -2015,7 +2015,7 @@
           <a:p>
             <a:fld id="{6F998A3A-B3F1-C640-8709-1356562CC12B}" type="datetimeFigureOut">
               <a:rPr lang="en-US" smtClean="0"/>
-              <a:t>9/27/21</a:t>
+              <a:t>9/28/26</a:t>
             </a:fld>
             <a:endParaRPr lang="en-US"/>
           </a:p>
@@ -2434,7 +2434,7 @@
           <a:p>
             <a:fld id="{6F998A3A-B3F1-C640-8709-1356562CC12B}" type="datetimeFigureOut">
               <a:rPr lang="en-US" smtClean="0"/>
-              <a:t>9/27/21</a:t>
+              <a:t>9/28/26</a:t>
             </a:fld>
             <a:endParaRPr lang="en-US"/>
           </a:p>
@@ -2551,7 +2551,7 @@
           <a:p>
             <a:fld id="{6F998A3A-B3F1-C640-8709-1356562CC12B}" type="datetimeFigureOut">
               <a:rPr lang="en-US" smtClean="0"/>
-              <a:t>9/27/21</a:t>
+              <a:t>9/28/26</a:t>
             </a:fld>
             <a:endParaRPr lang="en-US"/>
           </a:p>
@@ -2646,7 +2646,7 @@
           <a:p>
             <a:fld id="{6F998A3A-B3F1-C640-8709-1356562CC12B}" type="datetimeFigureOut">
               <a:rPr lang="en-US" smtClean="0"/>
-              <a:t>9/27/21</a:t>
+              <a:t>9/28/26</a:t>
             </a:fld>
             <a:endParaRPr lang="en-US"/>
           </a:p>
@@ -2921,7 +2921,7 @@
           <a:p>
             <a:fld id="{6F998A3A-B3F1-C640-8709-1356562CC12B}" type="datetimeFigureOut">
               <a:rPr lang="en-US" smtClean="0"/>
-              <a:t>9/27/21</a:t>
+              <a:t>9/28/26</a:t>
             </a:fld>
             <a:endParaRPr lang="en-US"/>
           </a:p>
@@ -3173,7 +3173,7 @@
           <a:p>
             <a:fld id="{6F998A3A-B3F1-C640-8709-1356562CC12B}" type="datetimeFigureOut">
               <a:rPr lang="en-US" smtClean="0"/>
-              <a:t>9/27/21</a:t>
+              <a:t>9/28/26</a:t>
             </a:fld>
             <a:endParaRPr lang="en-US"/>
           </a:p>
@@ -3384,7 +3384,7 @@
           <a:p>
             <a:fld id="{6F998A3A-B3F1-C640-8709-1356562CC12B}" type="datetimeFigureOut">
               <a:rPr lang="en-US" smtClean="0"/>
-              <a:t>9/27/21</a:t>
+              <a:t>9/28/26</a:t>
             </a:fld>
             <a:endParaRPr lang="en-US"/>
           </a:p>
@@ -3743,7 +3743,7 @@
 </file>
 
 <file path=ppt/slides/slide1.xml><?xml version="1.0" encoding="utf-8"?>
-<p:sld xmlns:a="http://schemas.openxmlformats.org/drawingml/2006/main" xmlns:r="http://schemas.openxmlformats.org/officeDocument/2006/relationships" xmlns:p="http://schemas.openxmlformats.org/presentationml/2006/main" show="0">
+<p:sld xmlns:a="http://schemas.openxmlformats.org/drawingml/2006/main" xmlns:r="http://schemas.openxmlformats.org/officeDocument/2006/relationships" xmlns:p="http://schemas.openxmlformats.org/presentationml/2006/main">
   <p:cSld>
     <p:spTree>
       <p:nvGrpSpPr>
@@ -9166,7 +9166,7 @@
 </file>
 
 <file path=ppt/slides/slide16.xml><?xml version="1.0" encoding="utf-8"?>
-<p:sld xmlns:a="http://schemas.openxmlformats.org/drawingml/2006/main" xmlns:r="http://schemas.openxmlformats.org/officeDocument/2006/relationships" xmlns:p="http://schemas.openxmlformats.org/presentationml/2006/main" show="0">
+<p:sld xmlns:a="http://schemas.openxmlformats.org/drawingml/2006/main" xmlns:r="http://schemas.openxmlformats.org/officeDocument/2006/relationships" xmlns:p="http://schemas.openxmlformats.org/presentationml/2006/main">
   <p:cSld>
     <p:spTree>
       <p:nvGrpSpPr>
@@ -9797,7 +9797,7 @@
 </file>
 
 <file path=ppt/slides/slide17.xml><?xml version="1.0" encoding="utf-8"?>
-<p:sld xmlns:a="http://schemas.openxmlformats.org/drawingml/2006/main" xmlns:r="http://schemas.openxmlformats.org/officeDocument/2006/relationships" xmlns:p="http://schemas.openxmlformats.org/presentationml/2006/main" show="0">
+<p:sld xmlns:a="http://schemas.openxmlformats.org/drawingml/2006/main" xmlns:r="http://schemas.openxmlformats.org/officeDocument/2006/relationships" xmlns:p="http://schemas.openxmlformats.org/presentationml/2006/main">
   <p:cSld>
     <p:spTree>
       <p:nvGrpSpPr>
@@ -10496,7 +10496,7 @@
 </file>
 
 <file path=ppt/slides/slide18.xml><?xml version="1.0" encoding="utf-8"?>
-<p:sld xmlns:a="http://schemas.openxmlformats.org/drawingml/2006/main" xmlns:r="http://schemas.openxmlformats.org/officeDocument/2006/relationships" xmlns:p="http://schemas.openxmlformats.org/presentationml/2006/main" show="0">
+<p:sld xmlns:a="http://schemas.openxmlformats.org/drawingml/2006/main" xmlns:r="http://schemas.openxmlformats.org/officeDocument/2006/relationships" xmlns:p="http://schemas.openxmlformats.org/presentationml/2006/main">
   <p:cSld>
     <p:spTree>
       <p:nvGrpSpPr>
@@ -10681,7 +10681,7 @@
 </file>
 
 <file path=ppt/slides/slide19.xml><?xml version="1.0" encoding="utf-8"?>
-<p:sld xmlns:a="http://schemas.openxmlformats.org/drawingml/2006/main" xmlns:r="http://schemas.openxmlformats.org/officeDocument/2006/relationships" xmlns:p="http://schemas.openxmlformats.org/presentationml/2006/main" show="0">
+<p:sld xmlns:a="http://schemas.openxmlformats.org/drawingml/2006/main" xmlns:r="http://schemas.openxmlformats.org/officeDocument/2006/relationships" xmlns:p="http://schemas.openxmlformats.org/presentationml/2006/main">
   <p:cSld>
     <p:spTree>
       <p:nvGrpSpPr>
@@ -11792,7 +11792,7 @@
 </file>
 
 <file path=ppt/slides/slide2.xml><?xml version="1.0" encoding="utf-8"?>
-<p:sld xmlns:a="http://schemas.openxmlformats.org/drawingml/2006/main" xmlns:r="http://schemas.openxmlformats.org/officeDocument/2006/relationships" xmlns:p="http://schemas.openxmlformats.org/presentationml/2006/main" show="0">
+<p:sld xmlns:a="http://schemas.openxmlformats.org/drawingml/2006/main" xmlns:r="http://schemas.openxmlformats.org/officeDocument/2006/relationships" xmlns:p="http://schemas.openxmlformats.org/presentationml/2006/main">
   <p:cSld>
     <p:spTree>
       <p:nvGrpSpPr>
@@ -11850,7 +11850,7 @@
         <p:spPr/>
         <p:txBody>
           <a:bodyPr>
-            <a:normAutofit lnSpcReduction="10000"/>
+            <a:normAutofit/>
           </a:bodyPr>
           <a:lstStyle/>
           <a:p>
@@ -11862,14 +11862,7 @@
           <a:p>
             <a:r>
               <a:rPr lang="en-US" dirty="0"/>
-              <a:t>Pointers</a:t>
-            </a:r>
-          </a:p>
-          <a:p>
-            <a:pPr lvl="1"/>
-            <a:r>
-              <a:rPr lang="en-US" dirty="0"/>
-              <a:t>Pointers are addresses</a:t>
+              <a:t>Pointers: they are addresses</a:t>
             </a:r>
           </a:p>
           <a:p>
@@ -11890,28 +11883,14 @@
           <a:p>
             <a:r>
               <a:rPr lang="en-US" dirty="0"/>
-              <a:t>Today’s lesson:</a:t>
+              <a:t>Arrays: contiguous elements of the same type</a:t>
             </a:r>
           </a:p>
           <a:p>
             <a:pPr lvl="1"/>
             <a:r>
               <a:rPr lang="en-US" dirty="0"/>
-              <a:t>Array and its relationship with pointer</a:t>
-            </a:r>
-          </a:p>
-          <a:p>
-            <a:pPr lvl="1"/>
-            <a:r>
-              <a:rPr lang="en-US" dirty="0"/>
-              <a:t>Pointer casting</a:t>
-            </a:r>
-          </a:p>
-          <a:p>
-            <a:pPr lvl="1"/>
-            <a:r>
-              <a:rPr lang="en-US" dirty="0"/>
-              <a:t>Characters &amp; strings</a:t>
+              <a:t>Using pointers (w/ pointer arithmetic) to access array elements</a:t>
             </a:r>
           </a:p>
         </p:txBody>
@@ -11930,7 +11909,7 @@
 </file>
 
 <file path=ppt/slides/slide20.xml><?xml version="1.0" encoding="utf-8"?>
-<p:sld xmlns:a="http://schemas.openxmlformats.org/drawingml/2006/main" xmlns:r="http://schemas.openxmlformats.org/officeDocument/2006/relationships" xmlns:p="http://schemas.openxmlformats.org/presentationml/2006/main" show="0">
+<p:sld xmlns:a="http://schemas.openxmlformats.org/drawingml/2006/main" xmlns:r="http://schemas.openxmlformats.org/officeDocument/2006/relationships" xmlns:p="http://schemas.openxmlformats.org/presentationml/2006/main">
   <p:cSld>
     <p:spTree>
       <p:nvGrpSpPr>
@@ -12980,7 +12959,7 @@
 </file>
 
 <file path=ppt/slides/slide21.xml><?xml version="1.0" encoding="utf-8"?>
-<p:sld xmlns:a="http://schemas.openxmlformats.org/drawingml/2006/main" xmlns:r="http://schemas.openxmlformats.org/officeDocument/2006/relationships" xmlns:p="http://schemas.openxmlformats.org/presentationml/2006/main" show="0">
+<p:sld xmlns:a="http://schemas.openxmlformats.org/drawingml/2006/main" xmlns:r="http://schemas.openxmlformats.org/officeDocument/2006/relationships" xmlns:p="http://schemas.openxmlformats.org/presentationml/2006/main">
   <p:cSld>
     <p:spTree>
       <p:nvGrpSpPr>
@@ -14145,7 +14124,7 @@
 </file>
 
 <file path=ppt/slides/slide22.xml><?xml version="1.0" encoding="utf-8"?>
-<p:sld xmlns:a="http://schemas.openxmlformats.org/drawingml/2006/main" xmlns:r="http://schemas.openxmlformats.org/officeDocument/2006/relationships" xmlns:p="http://schemas.openxmlformats.org/presentationml/2006/main" show="0">
+<p:sld xmlns:a="http://schemas.openxmlformats.org/drawingml/2006/main" xmlns:r="http://schemas.openxmlformats.org/officeDocument/2006/relationships" xmlns:p="http://schemas.openxmlformats.org/presentationml/2006/main">
   <p:cSld>
     <p:spTree>
       <p:nvGrpSpPr>

--- a/notes/06-char-string.pptx
+++ b/notes/06-char-string.pptx
@@ -49,12 +49,12 @@
     <p:sldId id="268" r:id="rId40"/>
     <p:sldId id="269" r:id="rId41"/>
     <p:sldId id="270" r:id="rId42"/>
-    <p:sldId id="271" r:id="rId43"/>
-    <p:sldId id="272" r:id="rId44"/>
-    <p:sldId id="273" r:id="rId45"/>
-    <p:sldId id="274" r:id="rId46"/>
-    <p:sldId id="275" r:id="rId47"/>
-    <p:sldId id="276" r:id="rId48"/>
+    <p:sldId id="351" r:id="rId43"/>
+    <p:sldId id="353" r:id="rId44"/>
+    <p:sldId id="352" r:id="rId45"/>
+    <p:sldId id="272" r:id="rId46"/>
+    <p:sldId id="273" r:id="rId47"/>
+    <p:sldId id="275" r:id="rId48"/>
     <p:sldId id="277" r:id="rId49"/>
     <p:sldId id="278" r:id="rId50"/>
     <p:sldId id="350" r:id="rId51"/>
@@ -189,6 +189,14 @@
     </p:ext>
   </p:extLst>
 </p:presentation>
+</file>
+
+<file path=ppt/revisionInfo.xml><?xml version="1.0" encoding="utf-8"?>
+<p1510:revInfo xmlns:a="http://schemas.openxmlformats.org/drawingml/2006/main" xmlns:r="http://schemas.openxmlformats.org/officeDocument/2006/relationships" xmlns:p1510="http://schemas.microsoft.com/office/powerpoint/2015/10/main">
+  <p1510:revLst>
+    <p1510:client id="{7B1F7273-9041-BF4A-9AF3-AC0D4F8050E0}" v="17" dt="2026-09-28T19:15:06.325"/>
+  </p1510:revLst>
+</p1510:revInfo>
 </file>
 
 <file path=ppt/notesMasters/notesMaster1.xml><?xml version="1.0" encoding="utf-8"?>
@@ -22271,7 +22279,13 @@
       </p:grpSpPr>
       <p:sp>
         <p:nvSpPr>
-          <p:cNvPr id="2" name="Title 1"/>
+          <p:cNvPr id="2" name="Title 1">
+            <a:extLst>
+              <a:ext uri="{FF2B5EF4-FFF2-40B4-BE49-F238E27FC236}">
+                <a16:creationId xmlns:a16="http://schemas.microsoft.com/office/drawing/2014/main" id="{9F15BF4E-3DC4-CEAE-B1F6-B5E58696A375}"/>
+              </a:ext>
+            </a:extLst>
+          </p:cNvPr>
           <p:cNvSpPr>
             <a:spLocks noGrp="1"/>
           </p:cNvSpPr>
@@ -22286,30 +22300,32 @@
           <a:p>
             <a:r>
               <a:rPr lang="en-US" dirty="0"/>
-              <a:t>C exercise 1: </a:t>
-            </a:r>
-            <a:r>
-              <a:rPr lang="en-US" dirty="0" err="1"/>
-              <a:t>tolower</a:t>
-            </a:r>
-            <a:endParaRPr lang="en-US" dirty="0"/>
-          </a:p>
-        </p:txBody>
-      </p:sp>
-      <p:sp>
-        <p:nvSpPr>
-          <p:cNvPr id="5" name="矩形 3"/>
-          <p:cNvSpPr/>
+              <a:t>char </a:t>
+            </a:r>
+          </a:p>
+        </p:txBody>
+      </p:sp>
+      <p:sp>
+        <p:nvSpPr>
+          <p:cNvPr id="5" name="TextBox 4">
+            <a:extLst>
+              <a:ext uri="{FF2B5EF4-FFF2-40B4-BE49-F238E27FC236}">
+                <a16:creationId xmlns:a16="http://schemas.microsoft.com/office/drawing/2014/main" id="{2B27F09D-D734-5ABB-0B75-DBD1ACCE1209}"/>
+              </a:ext>
+            </a:extLst>
+          </p:cNvPr>
+          <p:cNvSpPr txBox="1"/>
           <p:nvPr/>
         </p:nvSpPr>
         <p:spPr>
           <a:xfrm>
-            <a:off x="724768" y="1698590"/>
-            <a:ext cx="7962032" cy="4985980"/>
+            <a:off x="1653822" y="1666712"/>
+            <a:ext cx="4572000" cy="369332"/>
           </a:xfrm>
           <a:prstGeom prst="rect">
             <a:avLst/>
           </a:prstGeom>
+          <a:noFill/>
         </p:spPr>
         <p:txBody>
           <a:bodyPr wrap="square">
@@ -22317,193 +22333,560 @@
           </a:bodyPr>
           <a:lstStyle/>
           <a:p>
-            <a:r>
-              <a:rPr lang="en-US" altLang="zh-CN" dirty="0">
-                <a:solidFill>
-                  <a:srgbClr val="0000FF"/>
-                </a:solidFill>
-                <a:latin typeface="Consolas"/>
-                <a:cs typeface="Consolas"/>
-              </a:rPr>
-              <a:t>// </a:t>
-            </a:r>
-            <a:r>
-              <a:rPr lang="en-US" altLang="zh-CN" dirty="0" err="1">
-                <a:solidFill>
-                  <a:srgbClr val="0000FF"/>
-                </a:solidFill>
-                <a:latin typeface="Consolas"/>
-                <a:cs typeface="Consolas"/>
-              </a:rPr>
-              <a:t>tolower</a:t>
-            </a:r>
-            <a:r>
-              <a:rPr lang="en-US" altLang="zh-CN" dirty="0">
-                <a:solidFill>
-                  <a:srgbClr val="0000FF"/>
-                </a:solidFill>
-                <a:latin typeface="Consolas"/>
-                <a:cs typeface="Consolas"/>
-              </a:rPr>
-              <a:t> returns the corresponding </a:t>
-            </a:r>
-          </a:p>
-          <a:p>
-            <a:r>
-              <a:rPr lang="en-US" altLang="zh-CN" dirty="0">
-                <a:solidFill>
-                  <a:srgbClr val="0000FF"/>
-                </a:solidFill>
-                <a:latin typeface="Consolas"/>
-                <a:cs typeface="Consolas"/>
-              </a:rPr>
-              <a:t>// lowercase character for c if c is an </a:t>
-            </a:r>
-          </a:p>
-          <a:p>
-            <a:r>
-              <a:rPr lang="en-US" altLang="zh-CN" dirty="0">
-                <a:solidFill>
-                  <a:srgbClr val="0000FF"/>
-                </a:solidFill>
-                <a:latin typeface="Consolas"/>
-                <a:cs typeface="Consolas"/>
-              </a:rPr>
-              <a:t>// uppercase letter. Otherwise, it returns c.</a:t>
-            </a:r>
-          </a:p>
-          <a:p>
-            <a:r>
-              <a:rPr lang="en-US" altLang="zh-CN" sz="2400" dirty="0">
-                <a:latin typeface="Consolas"/>
-                <a:cs typeface="Consolas"/>
-              </a:rPr>
-              <a:t>char </a:t>
-            </a:r>
-            <a:r>
-              <a:rPr lang="en-US" altLang="zh-CN" sz="2400" dirty="0" err="1">
-                <a:latin typeface="Consolas"/>
-                <a:cs typeface="Consolas"/>
-              </a:rPr>
-              <a:t>tolower</a:t>
-            </a:r>
-            <a:r>
-              <a:rPr lang="en-US" altLang="zh-CN" sz="2400" dirty="0">
-                <a:latin typeface="Consolas"/>
-                <a:cs typeface="Consolas"/>
-              </a:rPr>
-              <a:t>(char c) {</a:t>
-            </a:r>
-          </a:p>
-          <a:p>
-            <a:endParaRPr lang="en-US" altLang="zh-CN" sz="2400" dirty="0">
-              <a:latin typeface="Consolas"/>
-              <a:cs typeface="Consolas"/>
-            </a:endParaRPr>
-          </a:p>
-          <a:p>
-            <a:endParaRPr lang="en-US" altLang="zh-CN" sz="2400" dirty="0">
-              <a:latin typeface="Consolas"/>
-              <a:cs typeface="Consolas"/>
-            </a:endParaRPr>
-          </a:p>
-          <a:p>
-            <a:endParaRPr lang="en-US" altLang="zh-CN" sz="2400" dirty="0">
-              <a:latin typeface="Consolas"/>
-              <a:cs typeface="Consolas"/>
-            </a:endParaRPr>
-          </a:p>
-          <a:p>
-            <a:endParaRPr lang="en-US" altLang="zh-CN" sz="2400" dirty="0">
-              <a:latin typeface="Consolas"/>
-              <a:cs typeface="Consolas"/>
-            </a:endParaRPr>
-          </a:p>
-          <a:p>
-            <a:r>
-              <a:rPr lang="en-US" altLang="zh-CN" sz="2400" dirty="0">
-                <a:latin typeface="Consolas"/>
-                <a:cs typeface="Consolas"/>
-              </a:rPr>
-              <a:t>}</a:t>
-            </a:r>
-          </a:p>
-          <a:p>
-            <a:r>
-              <a:rPr lang="en-US" altLang="zh-CN" sz="2400" dirty="0" err="1">
-                <a:latin typeface="Consolas"/>
-                <a:cs typeface="Consolas"/>
-              </a:rPr>
-              <a:t>int</a:t>
-            </a:r>
-            <a:r>
-              <a:rPr lang="en-US" altLang="zh-CN" sz="2400" dirty="0">
-                <a:latin typeface="Consolas"/>
-                <a:cs typeface="Consolas"/>
-              </a:rPr>
-              <a:t> main() {</a:t>
-            </a:r>
-          </a:p>
-          <a:p>
-            <a:r>
-              <a:rPr lang="en-US" altLang="zh-CN" sz="2400" dirty="0">
-                <a:latin typeface="Consolas"/>
-                <a:cs typeface="Consolas"/>
-              </a:rPr>
-              <a:t>   char c = ‘A’;</a:t>
-            </a:r>
-          </a:p>
-          <a:p>
-            <a:r>
-              <a:rPr lang="en-US" altLang="zh-CN" sz="2400" dirty="0">
-                <a:latin typeface="Consolas"/>
-                <a:cs typeface="Consolas"/>
-              </a:rPr>
-              <a:t>   c = </a:t>
-            </a:r>
-            <a:r>
-              <a:rPr lang="en-US" altLang="zh-CN" sz="2400" dirty="0" err="1">
-                <a:latin typeface="Consolas"/>
-                <a:cs typeface="Consolas"/>
-              </a:rPr>
-              <a:t>tolower</a:t>
-            </a:r>
-            <a:r>
-              <a:rPr lang="en-US" altLang="zh-CN" sz="2400" dirty="0">
-                <a:latin typeface="Consolas"/>
-                <a:cs typeface="Consolas"/>
-              </a:rPr>
-              <a:t>(c);</a:t>
-            </a:r>
-          </a:p>
-          <a:p>
-            <a:r>
-              <a:rPr lang="en-US" altLang="zh-CN" sz="2400" dirty="0">
-                <a:latin typeface="Consolas"/>
-                <a:cs typeface="Consolas"/>
-              </a:rPr>
-              <a:t>   ...</a:t>
-            </a:r>
-          </a:p>
-          <a:p>
-            <a:r>
-              <a:rPr lang="en-US" altLang="zh-CN" sz="2400" dirty="0">
-                <a:latin typeface="Consolas"/>
-                <a:cs typeface="Consolas"/>
-              </a:rPr>
-              <a:t>}</a:t>
-            </a:r>
-            <a:endParaRPr lang="zh-CN" altLang="en-US" sz="2400" dirty="0">
-              <a:latin typeface="Consolas"/>
-              <a:cs typeface="Consolas"/>
-            </a:endParaRPr>
+            <a:pPr rtl="0">
+              <a:buNone/>
+            </a:pPr>
+            <a:r>
+              <a:rPr lang="en-US" dirty="0">
+                <a:latin typeface="Consolas" panose="020B0609020204030204" pitchFamily="49" charset="0"/>
+                <a:cs typeface="Consolas" panose="020B0609020204030204" pitchFamily="49" charset="0"/>
+              </a:rPr>
+              <a:t>char c = ‘A’; </a:t>
+            </a:r>
+          </a:p>
+        </p:txBody>
+      </p:sp>
+      <p:sp>
+        <p:nvSpPr>
+          <p:cNvPr id="6" name="TextBox 5">
+            <a:extLst>
+              <a:ext uri="{FF2B5EF4-FFF2-40B4-BE49-F238E27FC236}">
+                <a16:creationId xmlns:a16="http://schemas.microsoft.com/office/drawing/2014/main" id="{245381DC-50C6-EF0A-470F-4137BDB75080}"/>
+              </a:ext>
+            </a:extLst>
+          </p:cNvPr>
+          <p:cNvSpPr txBox="1"/>
+          <p:nvPr/>
+        </p:nvSpPr>
+        <p:spPr>
+          <a:xfrm>
+            <a:off x="1653822" y="2180357"/>
+            <a:ext cx="4572000" cy="369332"/>
+          </a:xfrm>
+          <a:prstGeom prst="rect">
+            <a:avLst/>
+          </a:prstGeom>
+          <a:noFill/>
+        </p:spPr>
+        <p:txBody>
+          <a:bodyPr wrap="square">
+            <a:spAutoFit/>
+          </a:bodyPr>
+          <a:lstStyle/>
+          <a:p>
+            <a:pPr rtl="0">
+              <a:buNone/>
+            </a:pPr>
+            <a:r>
+              <a:rPr lang="en-US" dirty="0">
+                <a:latin typeface="Consolas" panose="020B0609020204030204" pitchFamily="49" charset="0"/>
+                <a:cs typeface="Consolas" panose="020B0609020204030204" pitchFamily="49" charset="0"/>
+              </a:rPr>
+              <a:t>char c = 65; </a:t>
+            </a:r>
+          </a:p>
+        </p:txBody>
+      </p:sp>
+      <p:sp>
+        <p:nvSpPr>
+          <p:cNvPr id="7" name="TextBox 6">
+            <a:extLst>
+              <a:ext uri="{FF2B5EF4-FFF2-40B4-BE49-F238E27FC236}">
+                <a16:creationId xmlns:a16="http://schemas.microsoft.com/office/drawing/2014/main" id="{59900E53-E711-21D3-50BB-6F56F233DE76}"/>
+              </a:ext>
+            </a:extLst>
+          </p:cNvPr>
+          <p:cNvSpPr txBox="1"/>
+          <p:nvPr/>
+        </p:nvSpPr>
+        <p:spPr>
+          <a:xfrm>
+            <a:off x="1653822" y="2694002"/>
+            <a:ext cx="4572000" cy="369332"/>
+          </a:xfrm>
+          <a:prstGeom prst="rect">
+            <a:avLst/>
+          </a:prstGeom>
+          <a:noFill/>
+        </p:spPr>
+        <p:txBody>
+          <a:bodyPr wrap="square">
+            <a:spAutoFit/>
+          </a:bodyPr>
+          <a:lstStyle/>
+          <a:p>
+            <a:pPr rtl="0">
+              <a:buNone/>
+            </a:pPr>
+            <a:r>
+              <a:rPr lang="en-US" dirty="0">
+                <a:latin typeface="Consolas" panose="020B0609020204030204" pitchFamily="49" charset="0"/>
+                <a:cs typeface="Consolas" panose="020B0609020204030204" pitchFamily="49" charset="0"/>
+              </a:rPr>
+              <a:t>char c = ‘\x41’; </a:t>
+            </a:r>
+          </a:p>
+        </p:txBody>
+      </p:sp>
+      <p:sp>
+        <p:nvSpPr>
+          <p:cNvPr id="8" name="TextBox 7">
+            <a:extLst>
+              <a:ext uri="{FF2B5EF4-FFF2-40B4-BE49-F238E27FC236}">
+                <a16:creationId xmlns:a16="http://schemas.microsoft.com/office/drawing/2014/main" id="{76D0458C-CB84-EB91-A846-2ADF2F633BD5}"/>
+              </a:ext>
+            </a:extLst>
+          </p:cNvPr>
+          <p:cNvSpPr txBox="1"/>
+          <p:nvPr/>
+        </p:nvSpPr>
+        <p:spPr>
+          <a:xfrm>
+            <a:off x="1653822" y="3244334"/>
+            <a:ext cx="4572000" cy="369332"/>
+          </a:xfrm>
+          <a:prstGeom prst="rect">
+            <a:avLst/>
+          </a:prstGeom>
+          <a:noFill/>
+        </p:spPr>
+        <p:txBody>
+          <a:bodyPr wrap="square">
+            <a:spAutoFit/>
+          </a:bodyPr>
+          <a:lstStyle/>
+          <a:p>
+            <a:pPr rtl="0">
+              <a:buNone/>
+            </a:pPr>
+            <a:r>
+              <a:rPr lang="en-US" dirty="0" err="1">
+                <a:latin typeface="Consolas" panose="020B0609020204030204" pitchFamily="49" charset="0"/>
+                <a:cs typeface="Consolas" panose="020B0609020204030204" pitchFamily="49" charset="0"/>
+              </a:rPr>
+              <a:t>printf</a:t>
+            </a:r>
+            <a:r>
+              <a:rPr lang="en-US" dirty="0">
+                <a:latin typeface="Consolas" panose="020B0609020204030204" pitchFamily="49" charset="0"/>
+                <a:cs typeface="Consolas" panose="020B0609020204030204" pitchFamily="49" charset="0"/>
+              </a:rPr>
+              <a:t>(“c=%c\n”, c);</a:t>
+            </a:r>
+          </a:p>
+        </p:txBody>
+      </p:sp>
+      <p:sp>
+        <p:nvSpPr>
+          <p:cNvPr id="9" name="TextBox 8">
+            <a:extLst>
+              <a:ext uri="{FF2B5EF4-FFF2-40B4-BE49-F238E27FC236}">
+                <a16:creationId xmlns:a16="http://schemas.microsoft.com/office/drawing/2014/main" id="{291E3F76-6E9D-8DE1-CC04-695EB0E084E1}"/>
+              </a:ext>
+            </a:extLst>
+          </p:cNvPr>
+          <p:cNvSpPr txBox="1"/>
+          <p:nvPr/>
+        </p:nvSpPr>
+        <p:spPr>
+          <a:xfrm>
+            <a:off x="1653822" y="3873688"/>
+            <a:ext cx="4572000" cy="369332"/>
+          </a:xfrm>
+          <a:prstGeom prst="rect">
+            <a:avLst/>
+          </a:prstGeom>
+          <a:noFill/>
+        </p:spPr>
+        <p:txBody>
+          <a:bodyPr wrap="square">
+            <a:spAutoFit/>
+          </a:bodyPr>
+          <a:lstStyle/>
+          <a:p>
+            <a:pPr rtl="0">
+              <a:buNone/>
+            </a:pPr>
+            <a:r>
+              <a:rPr lang="en-US" dirty="0" err="1">
+                <a:latin typeface="Consolas" panose="020B0609020204030204" pitchFamily="49" charset="0"/>
+                <a:cs typeface="Consolas" panose="020B0609020204030204" pitchFamily="49" charset="0"/>
+              </a:rPr>
+              <a:t>printf</a:t>
+            </a:r>
+            <a:r>
+              <a:rPr lang="en-US" dirty="0">
+                <a:latin typeface="Consolas" panose="020B0609020204030204" pitchFamily="49" charset="0"/>
+                <a:cs typeface="Consolas" panose="020B0609020204030204" pitchFamily="49" charset="0"/>
+              </a:rPr>
+              <a:t>(“c=%d\n”, c);</a:t>
+            </a:r>
           </a:p>
         </p:txBody>
       </p:sp>
     </p:spTree>
     <p:extLst>
       <p:ext uri="{BB962C8B-B14F-4D97-AF65-F5344CB8AC3E}">
-        <p14:creationId xmlns:p14="http://schemas.microsoft.com/office/powerpoint/2010/main" val="3488873074"/>
+        <p14:creationId xmlns:p14="http://schemas.microsoft.com/office/powerpoint/2010/main" val="4145194113"/>
+      </p:ext>
+    </p:extLst>
+  </p:cSld>
+  <p:clrMapOvr>
+    <a:masterClrMapping/>
+  </p:clrMapOvr>
+  <p:timing>
+    <p:tnLst>
+      <p:par>
+        <p:cTn id="1" dur="indefinite" restart="never" nodeType="tmRoot">
+          <p:childTnLst>
+            <p:seq concurrent="1" nextAc="seek">
+              <p:cTn id="2" dur="indefinite" nodeType="mainSeq">
+                <p:childTnLst>
+                  <p:par>
+                    <p:cTn id="3" fill="hold">
+                      <p:stCondLst>
+                        <p:cond delay="indefinite"/>
+                      </p:stCondLst>
+                      <p:childTnLst>
+                        <p:par>
+                          <p:cTn id="4" fill="hold">
+                            <p:stCondLst>
+                              <p:cond delay="0"/>
+                            </p:stCondLst>
+                            <p:childTnLst>
+                              <p:par>
+                                <p:cTn id="5" presetID="1" presetClass="entr" presetSubtype="0" fill="hold" grpId="0" nodeType="clickEffect">
+                                  <p:stCondLst>
+                                    <p:cond delay="0"/>
+                                  </p:stCondLst>
+                                  <p:childTnLst>
+                                    <p:set>
+                                      <p:cBhvr>
+                                        <p:cTn id="6" dur="1" fill="hold">
+                                          <p:stCondLst>
+                                            <p:cond delay="0"/>
+                                          </p:stCondLst>
+                                        </p:cTn>
+                                        <p:tgtEl>
+                                          <p:spTgt spid="6"/>
+                                        </p:tgtEl>
+                                        <p:attrNameLst>
+                                          <p:attrName>style.visibility</p:attrName>
+                                        </p:attrNameLst>
+                                      </p:cBhvr>
+                                      <p:to>
+                                        <p:strVal val="visible"/>
+                                      </p:to>
+                                    </p:set>
+                                  </p:childTnLst>
+                                </p:cTn>
+                              </p:par>
+                            </p:childTnLst>
+                          </p:cTn>
+                        </p:par>
+                      </p:childTnLst>
+                    </p:cTn>
+                  </p:par>
+                  <p:par>
+                    <p:cTn id="7" fill="hold">
+                      <p:stCondLst>
+                        <p:cond delay="indefinite"/>
+                      </p:stCondLst>
+                      <p:childTnLst>
+                        <p:par>
+                          <p:cTn id="8" fill="hold">
+                            <p:stCondLst>
+                              <p:cond delay="0"/>
+                            </p:stCondLst>
+                            <p:childTnLst>
+                              <p:par>
+                                <p:cTn id="9" presetID="1" presetClass="entr" presetSubtype="0" fill="hold" grpId="0" nodeType="clickEffect">
+                                  <p:stCondLst>
+                                    <p:cond delay="0"/>
+                                  </p:stCondLst>
+                                  <p:childTnLst>
+                                    <p:set>
+                                      <p:cBhvr>
+                                        <p:cTn id="10" dur="1" fill="hold">
+                                          <p:stCondLst>
+                                            <p:cond delay="0"/>
+                                          </p:stCondLst>
+                                        </p:cTn>
+                                        <p:tgtEl>
+                                          <p:spTgt spid="7"/>
+                                        </p:tgtEl>
+                                        <p:attrNameLst>
+                                          <p:attrName>style.visibility</p:attrName>
+                                        </p:attrNameLst>
+                                      </p:cBhvr>
+                                      <p:to>
+                                        <p:strVal val="visible"/>
+                                      </p:to>
+                                    </p:set>
+                                  </p:childTnLst>
+                                </p:cTn>
+                              </p:par>
+                            </p:childTnLst>
+                          </p:cTn>
+                        </p:par>
+                      </p:childTnLst>
+                    </p:cTn>
+                  </p:par>
+                  <p:par>
+                    <p:cTn id="11" fill="hold">
+                      <p:stCondLst>
+                        <p:cond delay="indefinite"/>
+                      </p:stCondLst>
+                      <p:childTnLst>
+                        <p:par>
+                          <p:cTn id="12" fill="hold">
+                            <p:stCondLst>
+                              <p:cond delay="0"/>
+                            </p:stCondLst>
+                            <p:childTnLst>
+                              <p:par>
+                                <p:cTn id="13" presetID="1" presetClass="entr" presetSubtype="0" fill="hold" grpId="0" nodeType="clickEffect">
+                                  <p:stCondLst>
+                                    <p:cond delay="0"/>
+                                  </p:stCondLst>
+                                  <p:childTnLst>
+                                    <p:set>
+                                      <p:cBhvr>
+                                        <p:cTn id="14" dur="1" fill="hold">
+                                          <p:stCondLst>
+                                            <p:cond delay="0"/>
+                                          </p:stCondLst>
+                                        </p:cTn>
+                                        <p:tgtEl>
+                                          <p:spTgt spid="8"/>
+                                        </p:tgtEl>
+                                        <p:attrNameLst>
+                                          <p:attrName>style.visibility</p:attrName>
+                                        </p:attrNameLst>
+                                      </p:cBhvr>
+                                      <p:to>
+                                        <p:strVal val="visible"/>
+                                      </p:to>
+                                    </p:set>
+                                  </p:childTnLst>
+                                </p:cTn>
+                              </p:par>
+                            </p:childTnLst>
+                          </p:cTn>
+                        </p:par>
+                      </p:childTnLst>
+                    </p:cTn>
+                  </p:par>
+                  <p:par>
+                    <p:cTn id="15" fill="hold">
+                      <p:stCondLst>
+                        <p:cond delay="indefinite"/>
+                      </p:stCondLst>
+                      <p:childTnLst>
+                        <p:par>
+                          <p:cTn id="16" fill="hold">
+                            <p:stCondLst>
+                              <p:cond delay="0"/>
+                            </p:stCondLst>
+                            <p:childTnLst>
+                              <p:par>
+                                <p:cTn id="17" presetID="1" presetClass="entr" presetSubtype="0" fill="hold" grpId="0" nodeType="clickEffect">
+                                  <p:stCondLst>
+                                    <p:cond delay="0"/>
+                                  </p:stCondLst>
+                                  <p:childTnLst>
+                                    <p:set>
+                                      <p:cBhvr>
+                                        <p:cTn id="18" dur="1" fill="hold">
+                                          <p:stCondLst>
+                                            <p:cond delay="0"/>
+                                          </p:stCondLst>
+                                        </p:cTn>
+                                        <p:tgtEl>
+                                          <p:spTgt spid="9"/>
+                                        </p:tgtEl>
+                                        <p:attrNameLst>
+                                          <p:attrName>style.visibility</p:attrName>
+                                        </p:attrNameLst>
+                                      </p:cBhvr>
+                                      <p:to>
+                                        <p:strVal val="visible"/>
+                                      </p:to>
+                                    </p:set>
+                                  </p:childTnLst>
+                                </p:cTn>
+                              </p:par>
+                            </p:childTnLst>
+                          </p:cTn>
+                        </p:par>
+                      </p:childTnLst>
+                    </p:cTn>
+                  </p:par>
+                </p:childTnLst>
+              </p:cTn>
+              <p:prevCondLst>
+                <p:cond evt="onPrev" delay="0">
+                  <p:tgtEl>
+                    <p:sldTgt/>
+                  </p:tgtEl>
+                </p:cond>
+              </p:prevCondLst>
+              <p:nextCondLst>
+                <p:cond evt="onNext" delay="0">
+                  <p:tgtEl>
+                    <p:sldTgt/>
+                  </p:tgtEl>
+                </p:cond>
+              </p:nextCondLst>
+            </p:seq>
+          </p:childTnLst>
+        </p:cTn>
+      </p:par>
+    </p:tnLst>
+    <p:bldLst>
+      <p:bldP spid="6" grpId="0"/>
+      <p:bldP spid="7" grpId="0"/>
+      <p:bldP spid="8" grpId="0"/>
+      <p:bldP spid="9" grpId="0"/>
+    </p:bldLst>
+  </p:timing>
+</p:sld>
+</file>
+
+<file path=ppt/slides/slide43.xml><?xml version="1.0" encoding="utf-8"?>
+<p:sld xmlns:a="http://schemas.openxmlformats.org/drawingml/2006/main" xmlns:r="http://schemas.openxmlformats.org/officeDocument/2006/relationships" xmlns:p="http://schemas.openxmlformats.org/presentationml/2006/main">
+  <p:cSld>
+    <p:spTree>
+      <p:nvGrpSpPr>
+        <p:cNvPr id="1" name="">
+          <a:extLst>
+            <a:ext uri="{FF2B5EF4-FFF2-40B4-BE49-F238E27FC236}">
+              <a16:creationId xmlns:a16="http://schemas.microsoft.com/office/drawing/2014/main" id="{CAF895FA-4505-1A17-1841-4E9401735A30}"/>
+            </a:ext>
+          </a:extLst>
+        </p:cNvPr>
+        <p:cNvGrpSpPr/>
+        <p:nvPr/>
+      </p:nvGrpSpPr>
+      <p:grpSpPr>
+        <a:xfrm>
+          <a:off x="0" y="0"/>
+          <a:ext cx="0" cy="0"/>
+          <a:chOff x="0" y="0"/>
+          <a:chExt cx="0" cy="0"/>
+        </a:xfrm>
+      </p:grpSpPr>
+      <p:sp>
+        <p:nvSpPr>
+          <p:cNvPr id="2" name="Title 1">
+            <a:extLst>
+              <a:ext uri="{FF2B5EF4-FFF2-40B4-BE49-F238E27FC236}">
+                <a16:creationId xmlns:a16="http://schemas.microsoft.com/office/drawing/2014/main" id="{446F8564-BFBA-0A8B-4A17-8F060A837D78}"/>
+              </a:ext>
+            </a:extLst>
+          </p:cNvPr>
+          <p:cNvSpPr>
+            <a:spLocks noGrp="1"/>
+          </p:cNvSpPr>
+          <p:nvPr>
+            <p:ph type="title"/>
+          </p:nvPr>
+        </p:nvSpPr>
+        <p:spPr/>
+        <p:txBody>
+          <a:bodyPr/>
+          <a:lstStyle/>
+          <a:p>
+            <a:r>
+              <a:rPr lang="en-US" dirty="0"/>
+              <a:t>char </a:t>
+            </a:r>
+          </a:p>
+        </p:txBody>
+      </p:sp>
+      <p:sp>
+        <p:nvSpPr>
+          <p:cNvPr id="5" name="TextBox 4">
+            <a:extLst>
+              <a:ext uri="{FF2B5EF4-FFF2-40B4-BE49-F238E27FC236}">
+                <a16:creationId xmlns:a16="http://schemas.microsoft.com/office/drawing/2014/main" id="{C15544A8-43AF-952A-D7FF-6514E875A776}"/>
+              </a:ext>
+            </a:extLst>
+          </p:cNvPr>
+          <p:cNvSpPr txBox="1"/>
+          <p:nvPr/>
+        </p:nvSpPr>
+        <p:spPr>
+          <a:xfrm>
+            <a:off x="1653822" y="1666712"/>
+            <a:ext cx="4572000" cy="923330"/>
+          </a:xfrm>
+          <a:prstGeom prst="rect">
+            <a:avLst/>
+          </a:prstGeom>
+          <a:noFill/>
+        </p:spPr>
+        <p:txBody>
+          <a:bodyPr wrap="square">
+            <a:spAutoFit/>
+          </a:bodyPr>
+          <a:lstStyle/>
+          <a:p>
+            <a:pPr rtl="0">
+              <a:buNone/>
+            </a:pPr>
+            <a:r>
+              <a:rPr lang="en-US" dirty="0">
+                <a:latin typeface="Consolas" panose="020B0609020204030204" pitchFamily="49" charset="0"/>
+                <a:cs typeface="Consolas" panose="020B0609020204030204" pitchFamily="49" charset="0"/>
+              </a:rPr>
+              <a:t>char c = ‘A’;</a:t>
+            </a:r>
+          </a:p>
+          <a:p>
+            <a:pPr rtl="0">
+              <a:buNone/>
+            </a:pPr>
+            <a:r>
+              <a:rPr lang="en-US" dirty="0" err="1">
+                <a:latin typeface="Consolas" panose="020B0609020204030204" pitchFamily="49" charset="0"/>
+                <a:cs typeface="Consolas" panose="020B0609020204030204" pitchFamily="49" charset="0"/>
+              </a:rPr>
+              <a:t>c++</a:t>
+            </a:r>
+            <a:r>
+              <a:rPr lang="en-US" dirty="0">
+                <a:latin typeface="Consolas" panose="020B0609020204030204" pitchFamily="49" charset="0"/>
+                <a:cs typeface="Consolas" panose="020B0609020204030204" pitchFamily="49" charset="0"/>
+              </a:rPr>
+              <a:t>;</a:t>
+            </a:r>
+          </a:p>
+          <a:p>
+            <a:pPr rtl="0">
+              <a:buNone/>
+            </a:pPr>
+            <a:r>
+              <a:rPr lang="en-US" dirty="0" err="1">
+                <a:latin typeface="Consolas" panose="020B0609020204030204" pitchFamily="49" charset="0"/>
+                <a:cs typeface="Consolas" panose="020B0609020204030204" pitchFamily="49" charset="0"/>
+              </a:rPr>
+              <a:t>printf</a:t>
+            </a:r>
+            <a:r>
+              <a:rPr lang="en-US" dirty="0">
+                <a:latin typeface="Consolas" panose="020B0609020204030204" pitchFamily="49" charset="0"/>
+                <a:cs typeface="Consolas" panose="020B0609020204030204" pitchFamily="49" charset="0"/>
+              </a:rPr>
+              <a:t>(“c=%c, c=%d\n”, c, c); </a:t>
+            </a:r>
+          </a:p>
+        </p:txBody>
+      </p:sp>
+    </p:spTree>
+    <p:extLst>
+      <p:ext uri="{BB962C8B-B14F-4D97-AF65-F5344CB8AC3E}">
+        <p14:creationId xmlns:p14="http://schemas.microsoft.com/office/powerpoint/2010/main" val="2468003006"/>
       </p:ext>
     </p:extLst>
   </p:cSld>
@@ -22513,7 +22896,7 @@
 </p:sld>
 </file>
 
-<file path=ppt/slides/slide43.xml><?xml version="1.0" encoding="utf-8"?>
+<file path=ppt/slides/slide44.xml><?xml version="1.0" encoding="utf-8"?>
 <p:sld xmlns:a="http://schemas.openxmlformats.org/drawingml/2006/main" xmlns:r="http://schemas.openxmlformats.org/officeDocument/2006/relationships" xmlns:p="http://schemas.openxmlformats.org/presentationml/2006/main">
   <p:cSld>
     <p:spTree>
@@ -22530,6 +22913,103 @@
           <a:chExt cx="0" cy="0"/>
         </a:xfrm>
       </p:grpSpPr>
+      <mc:AlternateContent xmlns:mc="http://schemas.openxmlformats.org/markup-compatibility/2006">
+        <mc:Choice xmlns:we="http://schemas.microsoft.com/office/webextensions/webextension/2010/11" xmlns:pca="http://schemas.microsoft.com/office/powerpoint/2013/contentapp" Requires="we pca">
+          <p:graphicFrame>
+            <p:nvGraphicFramePr>
+              <p:cNvPr id="4" name="Content Placeholder 3">
+                <a:extLst>
+                  <a:ext uri="{FF2B5EF4-FFF2-40B4-BE49-F238E27FC236}">
+                    <a16:creationId xmlns:a16="http://schemas.microsoft.com/office/drawing/2014/main" id="{E93B1E0F-977A-C028-C809-F76B76169466}"/>
+                  </a:ext>
+                </a:extLst>
+              </p:cNvPr>
+              <p:cNvGraphicFramePr>
+                <a:graphicFrameLocks noGrp="1"/>
+              </p:cNvGraphicFramePr>
+              <p:nvPr>
+                <p:ph idx="1"/>
+                <p:extLst>
+                  <p:ext uri="{D42A27DB-BD31-4B8C-83A1-F6EECF244321}">
+                    <p14:modId xmlns:p14="http://schemas.microsoft.com/office/powerpoint/2010/main" val="767516279"/>
+                  </p:ext>
+                </p:extLst>
+              </p:nvPr>
+            </p:nvGraphicFramePr>
+            <p:xfrm>
+              <a:off x="253999" y="324555"/>
+              <a:ext cx="8720667" cy="6358467"/>
+            </p:xfrm>
+            <a:graphic>
+              <a:graphicData uri="http://schemas.microsoft.com/office/webextensions/webextension/2010/11">
+                <we:webextensionref xmlns:we="http://schemas.microsoft.com/office/webextensions/webextension/2010/11" xmlns:r="http://schemas.openxmlformats.org/officeDocument/2006/relationships" r:id="rId2"/>
+              </a:graphicData>
+            </a:graphic>
+          </p:graphicFrame>
+        </mc:Choice>
+        <mc:Fallback>
+          <p:pic>
+            <p:nvPicPr>
+              <p:cNvPr id="4" name="Content Placeholder 3">
+                <a:extLst>
+                  <a:ext uri="{FF2B5EF4-FFF2-40B4-BE49-F238E27FC236}">
+                    <a16:creationId xmlns:a16="http://schemas.microsoft.com/office/drawing/2014/main" id="{E93B1E0F-977A-C028-C809-F76B76169466}"/>
+                  </a:ext>
+                </a:extLst>
+              </p:cNvPr>
+              <p:cNvPicPr>
+                <a:picLocks noGrp="1" noRot="1" noChangeAspect="1" noMove="1" noResize="1" noEditPoints="1" noAdjustHandles="1" noChangeArrowheads="1" noChangeShapeType="1"/>
+              </p:cNvPicPr>
+              <p:nvPr/>
+            </p:nvPicPr>
+            <p:blipFill>
+              <a:blip r:embed="rId3"/>
+              <a:stretch>
+                <a:fillRect/>
+              </a:stretch>
+            </p:blipFill>
+            <p:spPr>
+              <a:xfrm>
+                <a:off x="253999" y="324555"/>
+                <a:ext cx="8720667" cy="6358467"/>
+              </a:xfrm>
+              <a:prstGeom prst="rect">
+                <a:avLst/>
+              </a:prstGeom>
+            </p:spPr>
+          </p:pic>
+        </mc:Fallback>
+      </mc:AlternateContent>
+    </p:spTree>
+    <p:extLst>
+      <p:ext uri="{BB962C8B-B14F-4D97-AF65-F5344CB8AC3E}">
+        <p14:creationId xmlns:p14="http://schemas.microsoft.com/office/powerpoint/2010/main" val="1652697955"/>
+      </p:ext>
+    </p:extLst>
+  </p:cSld>
+  <p:clrMapOvr>
+    <a:masterClrMapping/>
+  </p:clrMapOvr>
+</p:sld>
+</file>
+
+<file path=ppt/slides/slide45.xml><?xml version="1.0" encoding="utf-8"?>
+<p:sld xmlns:a="http://schemas.openxmlformats.org/drawingml/2006/main" xmlns:r="http://schemas.openxmlformats.org/officeDocument/2006/relationships" xmlns:p="http://schemas.openxmlformats.org/presentationml/2006/main">
+  <p:cSld>
+    <p:spTree>
+      <p:nvGrpSpPr>
+        <p:cNvPr id="1" name=""/>
+        <p:cNvGrpSpPr/>
+        <p:nvPr/>
+      </p:nvGrpSpPr>
+      <p:grpSpPr>
+        <a:xfrm>
+          <a:off x="0" y="0"/>
+          <a:ext cx="0" cy="0"/>
+          <a:chOff x="0" y="0"/>
+          <a:chExt cx="0" cy="0"/>
+        </a:xfrm>
+      </p:grpSpPr>
       <p:sp>
         <p:nvSpPr>
           <p:cNvPr id="2" name="Title 1"/>
@@ -22738,7 +23218,7 @@
 </p:sld>
 </file>
 
-<file path=ppt/slides/slide44.xml><?xml version="1.0" encoding="utf-8"?>
+<file path=ppt/slides/slide46.xml><?xml version="1.0" encoding="utf-8"?>
 <p:sld xmlns:a="http://schemas.openxmlformats.org/drawingml/2006/main" xmlns:r="http://schemas.openxmlformats.org/officeDocument/2006/relationships" xmlns:p="http://schemas.openxmlformats.org/presentationml/2006/main">
   <p:cSld>
     <p:spTree>
@@ -23102,672 +23582,6 @@
 </p:sld>
 </file>
 
-<file path=ppt/slides/slide45.xml><?xml version="1.0" encoding="utf-8"?>
-<p:sld xmlns:a="http://schemas.openxmlformats.org/drawingml/2006/main" xmlns:r="http://schemas.openxmlformats.org/officeDocument/2006/relationships" xmlns:p="http://schemas.openxmlformats.org/presentationml/2006/main">
-  <p:cSld>
-    <p:spTree>
-      <p:nvGrpSpPr>
-        <p:cNvPr id="1" name=""/>
-        <p:cNvGrpSpPr/>
-        <p:nvPr/>
-      </p:nvGrpSpPr>
-      <p:grpSpPr>
-        <a:xfrm>
-          <a:off x="0" y="0"/>
-          <a:ext cx="0" cy="0"/>
-          <a:chOff x="0" y="0"/>
-          <a:chExt cx="0" cy="0"/>
-        </a:xfrm>
-      </p:grpSpPr>
-      <p:sp>
-        <p:nvSpPr>
-          <p:cNvPr id="2" name="Title 1"/>
-          <p:cNvSpPr>
-            <a:spLocks noGrp="1"/>
-          </p:cNvSpPr>
-          <p:nvPr>
-            <p:ph type="title"/>
-          </p:nvPr>
-        </p:nvSpPr>
-        <p:spPr/>
-        <p:txBody>
-          <a:bodyPr/>
-          <a:lstStyle/>
-          <a:p>
-            <a:r>
-              <a:rPr lang="en-US" dirty="0"/>
-              <a:t>C exercise 2: </a:t>
-            </a:r>
-            <a:r>
-              <a:rPr lang="en-US" dirty="0" err="1"/>
-              <a:t>toDigit</a:t>
-            </a:r>
-            <a:endParaRPr lang="en-US" dirty="0"/>
-          </a:p>
-        </p:txBody>
-      </p:sp>
-      <p:sp>
-        <p:nvSpPr>
-          <p:cNvPr id="4" name="矩形 3"/>
-          <p:cNvSpPr/>
-          <p:nvPr/>
-        </p:nvSpPr>
-        <p:spPr>
-          <a:xfrm>
-            <a:off x="209006" y="1492652"/>
-            <a:ext cx="9115864" cy="4985980"/>
-          </a:xfrm>
-          <a:prstGeom prst="rect">
-            <a:avLst/>
-          </a:prstGeom>
-        </p:spPr>
-        <p:txBody>
-          <a:bodyPr wrap="square">
-            <a:spAutoFit/>
-          </a:bodyPr>
-          <a:lstStyle/>
-          <a:p>
-            <a:r>
-              <a:rPr lang="en-US" altLang="zh-CN" dirty="0">
-                <a:solidFill>
-                  <a:srgbClr val="0000FF"/>
-                </a:solidFill>
-                <a:latin typeface="Consolas"/>
-                <a:cs typeface="Consolas"/>
-              </a:rPr>
-              <a:t>// </a:t>
-            </a:r>
-            <a:r>
-              <a:rPr lang="en-US" altLang="zh-CN" dirty="0" err="1">
-                <a:solidFill>
-                  <a:srgbClr val="0000FF"/>
-                </a:solidFill>
-                <a:latin typeface="Consolas"/>
-                <a:cs typeface="Consolas"/>
-              </a:rPr>
-              <a:t>toDigit</a:t>
-            </a:r>
-            <a:r>
-              <a:rPr lang="en-US" altLang="zh-CN" dirty="0">
-                <a:solidFill>
-                  <a:srgbClr val="0000FF"/>
-                </a:solidFill>
-                <a:latin typeface="Consolas"/>
-                <a:cs typeface="Consolas"/>
-              </a:rPr>
-              <a:t> returns the corresponding integer for c </a:t>
-            </a:r>
-          </a:p>
-          <a:p>
-            <a:r>
-              <a:rPr lang="en-US" altLang="zh-CN" dirty="0">
-                <a:solidFill>
-                  <a:srgbClr val="0000FF"/>
-                </a:solidFill>
-                <a:latin typeface="Consolas"/>
-                <a:cs typeface="Consolas"/>
-              </a:rPr>
-              <a:t>// if c is a valid digit character, </a:t>
-            </a:r>
-            <a:r>
-              <a:rPr lang="en-US" altLang="zh-CN" dirty="0" err="1">
-                <a:solidFill>
-                  <a:srgbClr val="0000FF"/>
-                </a:solidFill>
-                <a:latin typeface="Consolas"/>
-                <a:cs typeface="Consolas"/>
-              </a:rPr>
-              <a:t>e.g</a:t>
-            </a:r>
-            <a:r>
-              <a:rPr lang="en-US" altLang="zh-CN" dirty="0">
-                <a:solidFill>
-                  <a:srgbClr val="0000FF"/>
-                </a:solidFill>
-                <a:latin typeface="Consolas"/>
-                <a:cs typeface="Consolas"/>
-              </a:rPr>
-              <a:t> ‘1’, ‘2’,</a:t>
-            </a:r>
-          </a:p>
-          <a:p>
-            <a:r>
-              <a:rPr lang="en-US" altLang="zh-CN" dirty="0">
-                <a:solidFill>
-                  <a:srgbClr val="0000FF"/>
-                </a:solidFill>
-                <a:latin typeface="Consolas"/>
-                <a:cs typeface="Consolas"/>
-              </a:rPr>
-              <a:t>// Otherwise, it returns -1.</a:t>
-            </a:r>
-          </a:p>
-          <a:p>
-            <a:r>
-              <a:rPr lang="en-US" altLang="zh-CN" sz="2400" dirty="0" err="1">
-                <a:latin typeface="Consolas"/>
-                <a:cs typeface="Consolas"/>
-              </a:rPr>
-              <a:t>int</a:t>
-            </a:r>
-            <a:r>
-              <a:rPr lang="en-US" altLang="zh-CN" sz="2400" dirty="0">
-                <a:latin typeface="Consolas"/>
-                <a:cs typeface="Consolas"/>
-              </a:rPr>
-              <a:t> </a:t>
-            </a:r>
-            <a:r>
-              <a:rPr lang="en-US" altLang="zh-CN" sz="2400" dirty="0" err="1">
-                <a:latin typeface="Consolas"/>
-                <a:cs typeface="Consolas"/>
-              </a:rPr>
-              <a:t>toDigit</a:t>
-            </a:r>
-            <a:r>
-              <a:rPr lang="en-US" altLang="zh-CN" sz="2400" dirty="0">
-                <a:latin typeface="Consolas"/>
-                <a:cs typeface="Consolas"/>
-              </a:rPr>
-              <a:t>(char c) {</a:t>
-            </a:r>
-          </a:p>
-          <a:p>
-            <a:endParaRPr lang="en-US" altLang="zh-CN" sz="2400" dirty="0">
-              <a:latin typeface="Consolas"/>
-              <a:cs typeface="Consolas"/>
-            </a:endParaRPr>
-          </a:p>
-          <a:p>
-            <a:endParaRPr lang="en-US" altLang="zh-CN" sz="2400" dirty="0">
-              <a:latin typeface="Consolas"/>
-              <a:cs typeface="Consolas"/>
-            </a:endParaRPr>
-          </a:p>
-          <a:p>
-            <a:endParaRPr lang="en-US" altLang="zh-CN" sz="2400" dirty="0">
-              <a:latin typeface="Consolas"/>
-              <a:cs typeface="Consolas"/>
-            </a:endParaRPr>
-          </a:p>
-          <a:p>
-            <a:endParaRPr lang="en-US" altLang="zh-CN" sz="2400" dirty="0">
-              <a:latin typeface="Consolas"/>
-              <a:cs typeface="Consolas"/>
-            </a:endParaRPr>
-          </a:p>
-          <a:p>
-            <a:r>
-              <a:rPr lang="en-US" altLang="zh-CN" sz="2400" dirty="0">
-                <a:latin typeface="Consolas"/>
-                <a:cs typeface="Consolas"/>
-              </a:rPr>
-              <a:t>}</a:t>
-            </a:r>
-          </a:p>
-          <a:p>
-            <a:endParaRPr lang="en-US" altLang="zh-CN" sz="2400" dirty="0">
-              <a:latin typeface="Consolas"/>
-              <a:cs typeface="Consolas"/>
-            </a:endParaRPr>
-          </a:p>
-          <a:p>
-            <a:r>
-              <a:rPr lang="en-US" altLang="zh-CN" sz="2400" dirty="0" err="1">
-                <a:latin typeface="Consolas"/>
-                <a:cs typeface="Consolas"/>
-              </a:rPr>
-              <a:t>int</a:t>
-            </a:r>
-            <a:r>
-              <a:rPr lang="en-US" altLang="zh-CN" sz="2400" dirty="0">
-                <a:latin typeface="Consolas"/>
-                <a:cs typeface="Consolas"/>
-              </a:rPr>
-              <a:t> main() {</a:t>
-            </a:r>
-          </a:p>
-          <a:p>
-            <a:r>
-              <a:rPr lang="en-US" altLang="zh-CN" sz="2400" dirty="0">
-                <a:latin typeface="Consolas"/>
-                <a:cs typeface="Consolas"/>
-              </a:rPr>
-              <a:t>   </a:t>
-            </a:r>
-            <a:r>
-              <a:rPr lang="en-US" altLang="zh-CN" sz="2400" dirty="0" err="1">
-                <a:latin typeface="Consolas"/>
-                <a:cs typeface="Consolas"/>
-              </a:rPr>
-              <a:t>int</a:t>
-            </a:r>
-            <a:r>
-              <a:rPr lang="en-US" altLang="zh-CN" sz="2400" dirty="0">
-                <a:latin typeface="Consolas"/>
-                <a:cs typeface="Consolas"/>
-              </a:rPr>
-              <a:t> d = </a:t>
-            </a:r>
-            <a:r>
-              <a:rPr lang="en-US" altLang="zh-CN" sz="2400" dirty="0" err="1">
-                <a:latin typeface="Consolas"/>
-                <a:cs typeface="Consolas"/>
-              </a:rPr>
-              <a:t>toDigit</a:t>
-            </a:r>
-            <a:r>
-              <a:rPr lang="en-US" altLang="zh-CN" sz="2400" dirty="0">
-                <a:latin typeface="Consolas"/>
-                <a:cs typeface="Consolas"/>
-              </a:rPr>
-              <a:t>(‘8’);</a:t>
-            </a:r>
-          </a:p>
-          <a:p>
-            <a:r>
-              <a:rPr lang="en-US" altLang="zh-CN" sz="2400" dirty="0">
-                <a:latin typeface="Consolas"/>
-                <a:cs typeface="Consolas"/>
-              </a:rPr>
-              <a:t>   </a:t>
-            </a:r>
-            <a:r>
-              <a:rPr lang="en-US" altLang="zh-CN" sz="2400" dirty="0" err="1">
-                <a:latin typeface="Consolas"/>
-                <a:cs typeface="Consolas"/>
-              </a:rPr>
-              <a:t>printf</a:t>
-            </a:r>
-            <a:r>
-              <a:rPr lang="en-US" altLang="zh-CN" sz="2400" dirty="0">
-                <a:latin typeface="Consolas"/>
-                <a:cs typeface="Consolas"/>
-              </a:rPr>
-              <a:t>(“</a:t>
-            </a:r>
-            <a:r>
-              <a:rPr lang="en-US" altLang="zh-CN" sz="2400" dirty="0" err="1">
-                <a:latin typeface="Consolas"/>
-                <a:cs typeface="Consolas"/>
-              </a:rPr>
-              <a:t>int</a:t>
-            </a:r>
-            <a:r>
-              <a:rPr lang="en-US" altLang="zh-CN" sz="2400" dirty="0">
-                <a:latin typeface="Consolas"/>
-                <a:cs typeface="Consolas"/>
-              </a:rPr>
-              <a:t> is %d, multiply-by-2 %d\n”, d, 2*d);</a:t>
-            </a:r>
-          </a:p>
-          <a:p>
-            <a:r>
-              <a:rPr lang="en-US" altLang="zh-CN" sz="2400" dirty="0">
-                <a:latin typeface="Consolas"/>
-                <a:cs typeface="Consolas"/>
-              </a:rPr>
-              <a:t>}</a:t>
-            </a:r>
-            <a:endParaRPr lang="zh-CN" altLang="en-US" sz="2400" dirty="0">
-              <a:latin typeface="Consolas"/>
-              <a:cs typeface="Consolas"/>
-            </a:endParaRPr>
-          </a:p>
-        </p:txBody>
-      </p:sp>
-    </p:spTree>
-    <p:extLst>
-      <p:ext uri="{BB962C8B-B14F-4D97-AF65-F5344CB8AC3E}">
-        <p14:creationId xmlns:p14="http://schemas.microsoft.com/office/powerpoint/2010/main" val="3574788978"/>
-      </p:ext>
-    </p:extLst>
-  </p:cSld>
-  <p:clrMapOvr>
-    <a:masterClrMapping/>
-  </p:clrMapOvr>
-</p:sld>
-</file>
-
-<file path=ppt/slides/slide46.xml><?xml version="1.0" encoding="utf-8"?>
-<p:sld xmlns:a="http://schemas.openxmlformats.org/drawingml/2006/main" xmlns:r="http://schemas.openxmlformats.org/officeDocument/2006/relationships" xmlns:p="http://schemas.openxmlformats.org/presentationml/2006/main">
-  <p:cSld>
-    <p:spTree>
-      <p:nvGrpSpPr>
-        <p:cNvPr id="1" name=""/>
-        <p:cNvGrpSpPr/>
-        <p:nvPr/>
-      </p:nvGrpSpPr>
-      <p:grpSpPr>
-        <a:xfrm>
-          <a:off x="0" y="0"/>
-          <a:ext cx="0" cy="0"/>
-          <a:chOff x="0" y="0"/>
-          <a:chExt cx="0" cy="0"/>
-        </a:xfrm>
-      </p:grpSpPr>
-      <p:sp>
-        <p:nvSpPr>
-          <p:cNvPr id="2" name="Title 1"/>
-          <p:cNvSpPr>
-            <a:spLocks noGrp="1"/>
-          </p:cNvSpPr>
-          <p:nvPr>
-            <p:ph type="title"/>
-          </p:nvPr>
-        </p:nvSpPr>
-        <p:spPr/>
-        <p:txBody>
-          <a:bodyPr/>
-          <a:lstStyle/>
-          <a:p>
-            <a:r>
-              <a:rPr lang="en-US" dirty="0"/>
-              <a:t>C exercise 2: </a:t>
-            </a:r>
-            <a:r>
-              <a:rPr lang="en-US" dirty="0" err="1"/>
-              <a:t>toDigit</a:t>
-            </a:r>
-            <a:endParaRPr lang="en-US" dirty="0"/>
-          </a:p>
-        </p:txBody>
-      </p:sp>
-      <p:sp>
-        <p:nvSpPr>
-          <p:cNvPr id="4" name="矩形 3"/>
-          <p:cNvSpPr/>
-          <p:nvPr/>
-        </p:nvSpPr>
-        <p:spPr>
-          <a:xfrm>
-            <a:off x="209006" y="1492652"/>
-            <a:ext cx="9115864" cy="4985980"/>
-          </a:xfrm>
-          <a:prstGeom prst="rect">
-            <a:avLst/>
-          </a:prstGeom>
-        </p:spPr>
-        <p:txBody>
-          <a:bodyPr wrap="square">
-            <a:spAutoFit/>
-          </a:bodyPr>
-          <a:lstStyle/>
-          <a:p>
-            <a:r>
-              <a:rPr lang="en-US" altLang="zh-CN" dirty="0">
-                <a:solidFill>
-                  <a:srgbClr val="0000FF"/>
-                </a:solidFill>
-                <a:latin typeface="Consolas"/>
-                <a:cs typeface="Consolas"/>
-              </a:rPr>
-              <a:t>// </a:t>
-            </a:r>
-            <a:r>
-              <a:rPr lang="en-US" altLang="zh-CN" dirty="0" err="1">
-                <a:solidFill>
-                  <a:srgbClr val="0000FF"/>
-                </a:solidFill>
-                <a:latin typeface="Consolas"/>
-                <a:cs typeface="Consolas"/>
-              </a:rPr>
-              <a:t>toDigit</a:t>
-            </a:r>
-            <a:r>
-              <a:rPr lang="en-US" altLang="zh-CN" dirty="0">
-                <a:solidFill>
-                  <a:srgbClr val="0000FF"/>
-                </a:solidFill>
-                <a:latin typeface="Consolas"/>
-                <a:cs typeface="Consolas"/>
-              </a:rPr>
-              <a:t> returns the corresponding integer for c </a:t>
-            </a:r>
-          </a:p>
-          <a:p>
-            <a:r>
-              <a:rPr lang="en-US" altLang="zh-CN" dirty="0">
-                <a:solidFill>
-                  <a:srgbClr val="0000FF"/>
-                </a:solidFill>
-                <a:latin typeface="Consolas"/>
-                <a:cs typeface="Consolas"/>
-              </a:rPr>
-              <a:t>// if c is a valid digit character, </a:t>
-            </a:r>
-            <a:r>
-              <a:rPr lang="en-US" altLang="zh-CN" dirty="0" err="1">
-                <a:solidFill>
-                  <a:srgbClr val="0000FF"/>
-                </a:solidFill>
-                <a:latin typeface="Consolas"/>
-                <a:cs typeface="Consolas"/>
-              </a:rPr>
-              <a:t>e.g</a:t>
-            </a:r>
-            <a:r>
-              <a:rPr lang="en-US" altLang="zh-CN" dirty="0">
-                <a:solidFill>
-                  <a:srgbClr val="0000FF"/>
-                </a:solidFill>
-                <a:latin typeface="Consolas"/>
-                <a:cs typeface="Consolas"/>
-              </a:rPr>
-              <a:t> ‘1’, ‘2’,</a:t>
-            </a:r>
-          </a:p>
-          <a:p>
-            <a:r>
-              <a:rPr lang="en-US" altLang="zh-CN" dirty="0">
-                <a:solidFill>
-                  <a:srgbClr val="0000FF"/>
-                </a:solidFill>
-                <a:latin typeface="Consolas"/>
-                <a:cs typeface="Consolas"/>
-              </a:rPr>
-              <a:t>// Otherwise, it returns -1.</a:t>
-            </a:r>
-          </a:p>
-          <a:p>
-            <a:r>
-              <a:rPr lang="en-US" altLang="zh-CN" sz="2400" dirty="0" err="1">
-                <a:latin typeface="Consolas"/>
-                <a:cs typeface="Consolas"/>
-              </a:rPr>
-              <a:t>int</a:t>
-            </a:r>
-            <a:r>
-              <a:rPr lang="en-US" altLang="zh-CN" sz="2400" dirty="0">
-                <a:latin typeface="Consolas"/>
-                <a:cs typeface="Consolas"/>
-              </a:rPr>
-              <a:t> </a:t>
-            </a:r>
-            <a:r>
-              <a:rPr lang="en-US" altLang="zh-CN" sz="2400" dirty="0" err="1">
-                <a:latin typeface="Consolas"/>
-                <a:cs typeface="Consolas"/>
-              </a:rPr>
-              <a:t>toDigit</a:t>
-            </a:r>
-            <a:r>
-              <a:rPr lang="en-US" altLang="zh-CN" sz="2400" dirty="0">
-                <a:latin typeface="Consolas"/>
-                <a:cs typeface="Consolas"/>
-              </a:rPr>
-              <a:t>(char c) {</a:t>
-            </a:r>
-          </a:p>
-          <a:p>
-            <a:r>
-              <a:rPr lang="en-US" altLang="zh-CN" sz="2400" dirty="0">
-                <a:latin typeface="Consolas"/>
-                <a:cs typeface="Consolas"/>
-              </a:rPr>
-              <a:t>     // test if c is a valid character</a:t>
-            </a:r>
-          </a:p>
-          <a:p>
-            <a:r>
-              <a:rPr lang="en-US" altLang="zh-CN" sz="2400" dirty="0">
-                <a:latin typeface="Consolas"/>
-                <a:cs typeface="Consolas"/>
-              </a:rPr>
-              <a:t>     if (c &lt; ‘0’ || c &gt; ‘9’) {</a:t>
-            </a:r>
-          </a:p>
-          <a:p>
-            <a:r>
-              <a:rPr lang="en-US" altLang="zh-CN" sz="2400" dirty="0">
-                <a:latin typeface="Consolas"/>
-                <a:cs typeface="Consolas"/>
-              </a:rPr>
-              <a:t>         return -1;</a:t>
-            </a:r>
-          </a:p>
-          <a:p>
-            <a:r>
-              <a:rPr lang="en-US" altLang="zh-CN" sz="2400" dirty="0">
-                <a:latin typeface="Consolas"/>
-                <a:cs typeface="Consolas"/>
-              </a:rPr>
-              <a:t>     }</a:t>
-            </a:r>
-          </a:p>
-          <a:p>
-            <a:endParaRPr lang="en-US" altLang="zh-CN" sz="2400" dirty="0">
-              <a:latin typeface="Consolas"/>
-              <a:cs typeface="Consolas"/>
-            </a:endParaRPr>
-          </a:p>
-          <a:p>
-            <a:r>
-              <a:rPr lang="en-US" altLang="zh-CN" sz="2400" dirty="0">
-                <a:latin typeface="Consolas"/>
-                <a:cs typeface="Consolas"/>
-              </a:rPr>
-              <a:t>}</a:t>
-            </a:r>
-          </a:p>
-          <a:p>
-            <a:r>
-              <a:rPr lang="en-US" altLang="zh-CN" sz="2400" dirty="0" err="1">
-                <a:latin typeface="Consolas"/>
-                <a:cs typeface="Consolas"/>
-              </a:rPr>
-              <a:t>int</a:t>
-            </a:r>
-            <a:r>
-              <a:rPr lang="en-US" altLang="zh-CN" sz="2400" dirty="0">
-                <a:latin typeface="Consolas"/>
-                <a:cs typeface="Consolas"/>
-              </a:rPr>
-              <a:t> main() {</a:t>
-            </a:r>
-          </a:p>
-          <a:p>
-            <a:r>
-              <a:rPr lang="en-US" altLang="zh-CN" sz="2400" dirty="0">
-                <a:latin typeface="Consolas"/>
-                <a:cs typeface="Consolas"/>
-              </a:rPr>
-              <a:t>   </a:t>
-            </a:r>
-            <a:r>
-              <a:rPr lang="en-US" altLang="zh-CN" sz="2400" dirty="0" err="1">
-                <a:latin typeface="Consolas"/>
-                <a:cs typeface="Consolas"/>
-              </a:rPr>
-              <a:t>int</a:t>
-            </a:r>
-            <a:r>
-              <a:rPr lang="en-US" altLang="zh-CN" sz="2400" dirty="0">
-                <a:latin typeface="Consolas"/>
-                <a:cs typeface="Consolas"/>
-              </a:rPr>
-              <a:t> d = </a:t>
-            </a:r>
-            <a:r>
-              <a:rPr lang="en-US" altLang="zh-CN" sz="2400" dirty="0" err="1">
-                <a:latin typeface="Consolas"/>
-                <a:cs typeface="Consolas"/>
-              </a:rPr>
-              <a:t>toDigit</a:t>
-            </a:r>
-            <a:r>
-              <a:rPr lang="en-US" altLang="zh-CN" sz="2400" dirty="0">
-                <a:latin typeface="Consolas"/>
-                <a:cs typeface="Consolas"/>
-              </a:rPr>
-              <a:t>(‘8’);</a:t>
-            </a:r>
-          </a:p>
-          <a:p>
-            <a:r>
-              <a:rPr lang="en-US" altLang="zh-CN" sz="2400" dirty="0">
-                <a:latin typeface="Consolas"/>
-                <a:cs typeface="Consolas"/>
-              </a:rPr>
-              <a:t>   </a:t>
-            </a:r>
-            <a:r>
-              <a:rPr lang="en-US" altLang="zh-CN" sz="2400" dirty="0" err="1">
-                <a:latin typeface="Consolas"/>
-                <a:cs typeface="Consolas"/>
-              </a:rPr>
-              <a:t>printf</a:t>
-            </a:r>
-            <a:r>
-              <a:rPr lang="en-US" altLang="zh-CN" sz="2400" dirty="0">
-                <a:latin typeface="Consolas"/>
-                <a:cs typeface="Consolas"/>
-              </a:rPr>
-              <a:t>(“</a:t>
-            </a:r>
-            <a:r>
-              <a:rPr lang="en-US" altLang="zh-CN" sz="2400" dirty="0" err="1">
-                <a:latin typeface="Consolas"/>
-                <a:cs typeface="Consolas"/>
-              </a:rPr>
-              <a:t>int</a:t>
-            </a:r>
-            <a:r>
-              <a:rPr lang="en-US" altLang="zh-CN" sz="2400" dirty="0">
-                <a:latin typeface="Consolas"/>
-                <a:cs typeface="Consolas"/>
-              </a:rPr>
-              <a:t> is %d, multiply-by-2 %d\n”, d, 2*d);</a:t>
-            </a:r>
-          </a:p>
-          <a:p>
-            <a:r>
-              <a:rPr lang="en-US" altLang="zh-CN" sz="2400" dirty="0">
-                <a:latin typeface="Consolas"/>
-                <a:cs typeface="Consolas"/>
-              </a:rPr>
-              <a:t>}</a:t>
-            </a:r>
-            <a:endParaRPr lang="zh-CN" altLang="en-US" sz="2400" dirty="0">
-              <a:latin typeface="Consolas"/>
-              <a:cs typeface="Consolas"/>
-            </a:endParaRPr>
-          </a:p>
-        </p:txBody>
-      </p:sp>
-    </p:spTree>
-    <p:extLst>
-      <p:ext uri="{BB962C8B-B14F-4D97-AF65-F5344CB8AC3E}">
-        <p14:creationId xmlns:p14="http://schemas.microsoft.com/office/powerpoint/2010/main" val="3300518369"/>
-      </p:ext>
-    </p:extLst>
-  </p:cSld>
-  <p:clrMapOvr>
-    <a:masterClrMapping/>
-  </p:clrMapOvr>
-</p:sld>
-</file>
-
 <file path=ppt/slides/slide47.xml><?xml version="1.0" encoding="utf-8"?>
 <p:sld xmlns:a="http://schemas.openxmlformats.org/drawingml/2006/main" xmlns:r="http://schemas.openxmlformats.org/officeDocument/2006/relationships" xmlns:p="http://schemas.openxmlformats.org/presentationml/2006/main">
   <p:cSld>
@@ -23821,7 +23635,7 @@
         <p:spPr>
           <a:xfrm>
             <a:off x="209006" y="1492652"/>
-            <a:ext cx="9115864" cy="4985980"/>
+            <a:ext cx="9115864" cy="4339650"/>
           </a:xfrm>
           <a:prstGeom prst="rect">
             <a:avLst/>
@@ -23873,7 +23687,7 @@
                 <a:latin typeface="Consolas"/>
                 <a:cs typeface="Consolas"/>
               </a:rPr>
-              <a:t>// if c is a valid digit character, </a:t>
+              <a:t>// assuming c is a valid digit character, </a:t>
             </a:r>
             <a:r>
               <a:rPr lang="en-US" altLang="zh-CN" dirty="0" err="1">
@@ -23898,44 +23712,34 @@
           </a:p>
           <a:p>
             <a:r>
-              <a:rPr lang="en-US" altLang="zh-CN" dirty="0">
-                <a:solidFill>
-                  <a:srgbClr val="0000FF"/>
-                </a:solidFill>
-                <a:latin typeface="Consolas"/>
-                <a:cs typeface="Consolas"/>
-              </a:rPr>
-              <a:t>// Otherwise, it returns -1.</a:t>
-            </a:r>
-          </a:p>
-          <a:p>
+              <a:rPr lang="en-US" altLang="zh-CN" sz="2400" dirty="0">
+                <a:latin typeface="Consolas"/>
+                <a:cs typeface="Consolas"/>
+              </a:rPr>
+              <a:t>int </a:t>
+            </a:r>
             <a:r>
               <a:rPr lang="en-US" altLang="zh-CN" sz="2400" dirty="0" err="1">
                 <a:latin typeface="Consolas"/>
                 <a:cs typeface="Consolas"/>
               </a:rPr>
-              <a:t>int</a:t>
+              <a:t>toDigit</a:t>
             </a:r>
             <a:r>
               <a:rPr lang="en-US" altLang="zh-CN" sz="2400" dirty="0">
                 <a:latin typeface="Consolas"/>
                 <a:cs typeface="Consolas"/>
               </a:rPr>
-              <a:t> </a:t>
-            </a:r>
-            <a:r>
-              <a:rPr lang="en-US" altLang="zh-CN" sz="2400" dirty="0" err="1">
-                <a:latin typeface="Consolas"/>
-                <a:cs typeface="Consolas"/>
-              </a:rPr>
-              <a:t>toDigit</a:t>
-            </a:r>
+              <a:t>(char c) {</a:t>
+            </a:r>
+          </a:p>
+          <a:p>
             <a:r>
               <a:rPr lang="en-US" altLang="zh-CN" sz="2400" dirty="0">
                 <a:latin typeface="Consolas"/>
                 <a:cs typeface="Consolas"/>
               </a:rPr>
-              <a:t>(char c) {</a:t>
+              <a:t>     // crash if c is not a valid character</a:t>
             </a:r>
           </a:p>
           <a:p>
@@ -23944,8 +23748,14 @@
                 <a:latin typeface="Consolas"/>
                 <a:cs typeface="Consolas"/>
               </a:rPr>
-              <a:t>     // test if c is a valid character</a:t>
-            </a:r>
+              <a:t>     assert (c &gt;= ‘0’ &amp;&amp; c &lt;= ‘9’);</a:t>
+            </a:r>
+          </a:p>
+          <a:p>
+            <a:endParaRPr lang="en-US" altLang="zh-CN" sz="2400" dirty="0">
+              <a:latin typeface="Consolas"/>
+              <a:cs typeface="Consolas"/>
+            </a:endParaRPr>
           </a:p>
           <a:p>
             <a:r>
@@ -23953,34 +23763,7 @@
                 <a:latin typeface="Consolas"/>
                 <a:cs typeface="Consolas"/>
               </a:rPr>
-              <a:t>     if (c &lt; ‘0’ || c &gt; ‘9’) {</a:t>
-            </a:r>
-          </a:p>
-          <a:p>
-            <a:r>
-              <a:rPr lang="en-US" altLang="zh-CN" sz="2400" dirty="0">
-                <a:latin typeface="Consolas"/>
-                <a:cs typeface="Consolas"/>
-              </a:rPr>
-              <a:t>         return -1;</a:t>
-            </a:r>
-          </a:p>
-          <a:p>
-            <a:r>
-              <a:rPr lang="en-US" altLang="zh-CN" sz="2400" dirty="0">
-                <a:latin typeface="Consolas"/>
-                <a:cs typeface="Consolas"/>
-              </a:rPr>
-              <a:t>     }</a:t>
-            </a:r>
-          </a:p>
-          <a:p>
-            <a:r>
-              <a:rPr lang="en-US" altLang="zh-CN" sz="2400" dirty="0">
-                <a:latin typeface="Consolas"/>
-                <a:cs typeface="Consolas"/>
-              </a:rPr>
-              <a:t>     return c – ‘0’;</a:t>
+              <a:t>     </a:t>
             </a:r>
           </a:p>
           <a:p>
@@ -24097,16 +23880,138 @@
           </a:p>
         </p:txBody>
       </p:sp>
+      <p:sp>
+        <p:nvSpPr>
+          <p:cNvPr id="3" name="TextBox 2">
+            <a:extLst>
+              <a:ext uri="{FF2B5EF4-FFF2-40B4-BE49-F238E27FC236}">
+                <a16:creationId xmlns:a16="http://schemas.microsoft.com/office/drawing/2014/main" id="{4D701129-07B3-11B8-7F06-ABA5878433CE}"/>
+              </a:ext>
+            </a:extLst>
+          </p:cNvPr>
+          <p:cNvSpPr txBox="1"/>
+          <p:nvPr/>
+        </p:nvSpPr>
+        <p:spPr>
+          <a:xfrm>
+            <a:off x="1151466" y="3426178"/>
+            <a:ext cx="2733441" cy="461665"/>
+          </a:xfrm>
+          <a:prstGeom prst="rect">
+            <a:avLst/>
+          </a:prstGeom>
+          <a:solidFill>
+            <a:schemeClr val="accent2">
+              <a:lumMod val="40000"/>
+              <a:lumOff val="60000"/>
+            </a:schemeClr>
+          </a:solidFill>
+        </p:spPr>
+        <p:txBody>
+          <a:bodyPr wrap="none" rtlCol="0">
+            <a:spAutoFit/>
+          </a:bodyPr>
+          <a:lstStyle/>
+          <a:p>
+            <a:r>
+              <a:rPr lang="en-US" altLang="zh-CN" sz="2400" dirty="0">
+                <a:latin typeface="Consolas"/>
+                <a:cs typeface="Consolas"/>
+              </a:rPr>
+              <a:t>return c – ‘0’;</a:t>
+            </a:r>
+            <a:endParaRPr lang="en-US" sz="2400" dirty="0"/>
+          </a:p>
+        </p:txBody>
+      </p:sp>
     </p:spTree>
     <p:extLst>
       <p:ext uri="{BB962C8B-B14F-4D97-AF65-F5344CB8AC3E}">
-        <p14:creationId xmlns:p14="http://schemas.microsoft.com/office/powerpoint/2010/main" val="494500764"/>
+        <p14:creationId xmlns:p14="http://schemas.microsoft.com/office/powerpoint/2010/main" val="3300518369"/>
       </p:ext>
     </p:extLst>
   </p:cSld>
   <p:clrMapOvr>
     <a:masterClrMapping/>
   </p:clrMapOvr>
+  <p:timing>
+    <p:tnLst>
+      <p:par>
+        <p:cTn id="1" dur="indefinite" restart="never" nodeType="tmRoot">
+          <p:childTnLst>
+            <p:seq concurrent="1" nextAc="seek">
+              <p:cTn id="2" dur="indefinite" nodeType="mainSeq">
+                <p:childTnLst>
+                  <p:par>
+                    <p:cTn id="3" fill="hold">
+                      <p:stCondLst>
+                        <p:cond delay="indefinite"/>
+                      </p:stCondLst>
+                      <p:childTnLst>
+                        <p:par>
+                          <p:cTn id="4" fill="hold">
+                            <p:stCondLst>
+                              <p:cond delay="0"/>
+                            </p:stCondLst>
+                            <p:childTnLst>
+                              <p:par>
+                                <p:cTn id="5" presetID="1" presetClass="entr" presetSubtype="0" fill="hold" grpId="0" nodeType="clickEffect">
+                                  <p:stCondLst>
+                                    <p:cond delay="0"/>
+                                  </p:stCondLst>
+                                  <p:childTnLst>
+                                    <p:set>
+                                      <p:cBhvr>
+                                        <p:cTn id="6" dur="1" fill="hold">
+                                          <p:stCondLst>
+                                            <p:cond delay="0"/>
+                                          </p:stCondLst>
+                                        </p:cTn>
+                                        <p:tgtEl>
+                                          <p:spTgt spid="3"/>
+                                        </p:tgtEl>
+                                        <p:attrNameLst>
+                                          <p:attrName>style.visibility</p:attrName>
+                                        </p:attrNameLst>
+                                      </p:cBhvr>
+                                      <p:to>
+                                        <p:strVal val="visible"/>
+                                      </p:to>
+                                    </p:set>
+                                  </p:childTnLst>
+                                </p:cTn>
+                              </p:par>
+                            </p:childTnLst>
+                          </p:cTn>
+                        </p:par>
+                      </p:childTnLst>
+                    </p:cTn>
+                  </p:par>
+                </p:childTnLst>
+              </p:cTn>
+              <p:prevCondLst>
+                <p:cond evt="onPrev" delay="0">
+                  <p:tgtEl>
+                    <p:sldTgt/>
+                  </p:tgtEl>
+                </p:cond>
+              </p:prevCondLst>
+              <p:nextCondLst>
+                <p:cond evt="onNext" delay="0">
+                  <p:tgtEl>
+                    <p:sldTgt/>
+                  </p:tgtEl>
+                </p:cond>
+              </p:nextCondLst>
+            </p:seq>
+          </p:childTnLst>
+        </p:cTn>
+      </p:par>
+    </p:tnLst>
+    <p:bldLst>
+      <p:bldP spid="3" grpId="0" animBg="1"/>
+    </p:bldLst>
+  </p:timing>
 </p:sld>
 </file>
 
@@ -41518,4 +41423,18 @@
   </a:objectDefaults>
   <a:extraClrSchemeLst/>
 </a:theme>
+</file>
+
+<file path=ppt/webextensions/webextension1.xml><?xml version="1.0" encoding="utf-8"?>
+<we:webextension xmlns:we="http://schemas.microsoft.com/office/webextensions/webextension/2010/11" id="{8AAED1AF-EFCF-2644-8337-4AA24872CD11}">
+  <we:reference id="wa104218073" version="3.0.0.1" store="en-US" storeType="OMEX"/>
+  <we:alternateReferences>
+    <we:reference id="WA104218073" version="3.0.0.1" store="WA104218073" storeType="OMEX"/>
+  </we:alternateReferences>
+  <we:properties>
+    <we:property name="appSlideData" value="{&quot;slideId&quot;:352,&quot;confidenceLevel&quot;:2}"/>
+  </we:properties>
+  <we:bindings/>
+  <we:snapshot xmlns:r="http://schemas.openxmlformats.org/officeDocument/2006/relationships" r:embed="rId1"/>
+</we:webextension>
 </file>
--- a/notes/06-char-string.pptx
+++ b/notes/06-char-string.pptx
@@ -5,7 +5,7 @@
     <p:sldMasterId id="2147483648" r:id="rId1"/>
   </p:sldMasterIdLst>
   <p:notesMasterIdLst>
-    <p:notesMasterId r:id="rId68"/>
+    <p:notesMasterId r:id="rId69"/>
   </p:notesMasterIdLst>
   <p:sldIdLst>
     <p:sldId id="295" r:id="rId2"/>
@@ -68,12 +68,13 @@
     <p:sldId id="286" r:id="rId59"/>
     <p:sldId id="287" r:id="rId60"/>
     <p:sldId id="288" r:id="rId61"/>
-    <p:sldId id="289" r:id="rId62"/>
-    <p:sldId id="290" r:id="rId63"/>
-    <p:sldId id="291" r:id="rId64"/>
-    <p:sldId id="292" r:id="rId65"/>
-    <p:sldId id="293" r:id="rId66"/>
-    <p:sldId id="294" r:id="rId67"/>
+    <p:sldId id="354" r:id="rId62"/>
+    <p:sldId id="289" r:id="rId63"/>
+    <p:sldId id="290" r:id="rId64"/>
+    <p:sldId id="291" r:id="rId65"/>
+    <p:sldId id="292" r:id="rId66"/>
+    <p:sldId id="293" r:id="rId67"/>
+    <p:sldId id="294" r:id="rId68"/>
   </p:sldIdLst>
   <p:sldSz cx="9144000" cy="6858000" type="screen4x3"/>
   <p:notesSz cx="6858000" cy="9144000"/>
@@ -281,7 +282,7 @@
           <a:p>
             <a:fld id="{A74E6D30-F667-6B40-A3A3-6FED85F0F940}" type="datetimeFigureOut">
               <a:rPr lang="en-US" smtClean="0"/>
-              <a:t>9/28/26</a:t>
+              <a:t>9/30/26</a:t>
             </a:fld>
             <a:endParaRPr lang="en-US"/>
           </a:p>
@@ -979,7 +980,7 @@
           <a:p>
             <a:fld id="{6F998A3A-B3F1-C640-8709-1356562CC12B}" type="datetimeFigureOut">
               <a:rPr lang="en-US" smtClean="0"/>
-              <a:t>9/28/26</a:t>
+              <a:t>9/30/26</a:t>
             </a:fld>
             <a:endParaRPr lang="en-US"/>
           </a:p>
@@ -1147,7 +1148,7 @@
           <a:p>
             <a:fld id="{6F998A3A-B3F1-C640-8709-1356562CC12B}" type="datetimeFigureOut">
               <a:rPr lang="en-US" smtClean="0"/>
-              <a:t>9/28/26</a:t>
+              <a:t>9/30/26</a:t>
             </a:fld>
             <a:endParaRPr lang="en-US"/>
           </a:p>
@@ -1325,7 +1326,7 @@
           <a:p>
             <a:fld id="{6F998A3A-B3F1-C640-8709-1356562CC12B}" type="datetimeFigureOut">
               <a:rPr lang="en-US" smtClean="0"/>
-              <a:t>9/28/26</a:t>
+              <a:t>9/30/26</a:t>
             </a:fld>
             <a:endParaRPr lang="en-US"/>
           </a:p>
@@ -1493,7 +1494,7 @@
           <a:p>
             <a:fld id="{6F998A3A-B3F1-C640-8709-1356562CC12B}" type="datetimeFigureOut">
               <a:rPr lang="en-US" smtClean="0"/>
-              <a:t>9/28/26</a:t>
+              <a:t>9/30/26</a:t>
             </a:fld>
             <a:endParaRPr lang="en-US"/>
           </a:p>
@@ -1738,7 +1739,7 @@
           <a:p>
             <a:fld id="{6F998A3A-B3F1-C640-8709-1356562CC12B}" type="datetimeFigureOut">
               <a:rPr lang="en-US" smtClean="0"/>
-              <a:t>9/28/26</a:t>
+              <a:t>9/30/26</a:t>
             </a:fld>
             <a:endParaRPr lang="en-US"/>
           </a:p>
@@ -2023,7 +2024,7 @@
           <a:p>
             <a:fld id="{6F998A3A-B3F1-C640-8709-1356562CC12B}" type="datetimeFigureOut">
               <a:rPr lang="en-US" smtClean="0"/>
-              <a:t>9/28/26</a:t>
+              <a:t>9/30/26</a:t>
             </a:fld>
             <a:endParaRPr lang="en-US"/>
           </a:p>
@@ -2442,7 +2443,7 @@
           <a:p>
             <a:fld id="{6F998A3A-B3F1-C640-8709-1356562CC12B}" type="datetimeFigureOut">
               <a:rPr lang="en-US" smtClean="0"/>
-              <a:t>9/28/26</a:t>
+              <a:t>9/30/26</a:t>
             </a:fld>
             <a:endParaRPr lang="en-US"/>
           </a:p>
@@ -2559,7 +2560,7 @@
           <a:p>
             <a:fld id="{6F998A3A-B3F1-C640-8709-1356562CC12B}" type="datetimeFigureOut">
               <a:rPr lang="en-US" smtClean="0"/>
-              <a:t>9/28/26</a:t>
+              <a:t>9/30/26</a:t>
             </a:fld>
             <a:endParaRPr lang="en-US"/>
           </a:p>
@@ -2654,7 +2655,7 @@
           <a:p>
             <a:fld id="{6F998A3A-B3F1-C640-8709-1356562CC12B}" type="datetimeFigureOut">
               <a:rPr lang="en-US" smtClean="0"/>
-              <a:t>9/28/26</a:t>
+              <a:t>9/30/26</a:t>
             </a:fld>
             <a:endParaRPr lang="en-US"/>
           </a:p>
@@ -2929,7 +2930,7 @@
           <a:p>
             <a:fld id="{6F998A3A-B3F1-C640-8709-1356562CC12B}" type="datetimeFigureOut">
               <a:rPr lang="en-US" smtClean="0"/>
-              <a:t>9/28/26</a:t>
+              <a:t>9/30/26</a:t>
             </a:fld>
             <a:endParaRPr lang="en-US"/>
           </a:p>
@@ -3181,7 +3182,7 @@
           <a:p>
             <a:fld id="{6F998A3A-B3F1-C640-8709-1356562CC12B}" type="datetimeFigureOut">
               <a:rPr lang="en-US" smtClean="0"/>
-              <a:t>9/28/26</a:t>
+              <a:t>9/30/26</a:t>
             </a:fld>
             <a:endParaRPr lang="en-US"/>
           </a:p>
@@ -3392,7 +3393,7 @@
           <a:p>
             <a:fld id="{6F998A3A-B3F1-C640-8709-1356562CC12B}" type="datetimeFigureOut">
               <a:rPr lang="en-US" smtClean="0"/>
-              <a:t>9/28/26</a:t>
+              <a:t>9/30/26</a:t>
             </a:fld>
             <a:endParaRPr lang="en-US"/>
           </a:p>
@@ -22913,8 +22914,8 @@
           <a:chExt cx="0" cy="0"/>
         </a:xfrm>
       </p:grpSpPr>
-      <mc:AlternateContent xmlns:mc="http://schemas.openxmlformats.org/markup-compatibility/2006">
-        <mc:Choice xmlns:we="http://schemas.microsoft.com/office/webextensions/webextension/2010/11" xmlns:pca="http://schemas.microsoft.com/office/powerpoint/2013/contentapp" Requires="we pca">
+      <mc:AlternateContent xmlns:mc="http://schemas.openxmlformats.org/markup-compatibility/2006" xmlns:we="http://schemas.microsoft.com/office/webextensions/webextension/2010/11" xmlns:pca="http://schemas.microsoft.com/office/powerpoint/2013/contentapp">
+        <mc:Choice Requires="we pca">
           <p:graphicFrame>
             <p:nvGraphicFramePr>
               <p:cNvPr id="4" name="Content Placeholder 3">
@@ -22947,7 +22948,7 @@
             </a:graphic>
           </p:graphicFrame>
         </mc:Choice>
-        <mc:Fallback>
+        <mc:Fallback xmlns="">
           <p:pic>
             <p:nvPicPr>
               <p:cNvPr id="4" name="Content Placeholder 3">
@@ -31484,6 +31485,311 @@
       </p:grpSpPr>
       <p:sp>
         <p:nvSpPr>
+          <p:cNvPr id="2" name="Title 1">
+            <a:extLst>
+              <a:ext uri="{FF2B5EF4-FFF2-40B4-BE49-F238E27FC236}">
+                <a16:creationId xmlns:a16="http://schemas.microsoft.com/office/drawing/2014/main" id="{F21A6E16-4BFF-CD5A-7C0C-D53BDEA5159C}"/>
+              </a:ext>
+            </a:extLst>
+          </p:cNvPr>
+          <p:cNvSpPr>
+            <a:spLocks noGrp="1"/>
+          </p:cNvSpPr>
+          <p:nvPr>
+            <p:ph type="title"/>
+          </p:nvPr>
+        </p:nvSpPr>
+        <p:spPr/>
+        <p:txBody>
+          <a:bodyPr/>
+          <a:lstStyle/>
+          <a:p>
+            <a:r>
+              <a:rPr lang="en-US" dirty="0"/>
+              <a:t>What we’ve learnt last lecture</a:t>
+            </a:r>
+          </a:p>
+        </p:txBody>
+      </p:sp>
+      <p:sp>
+        <p:nvSpPr>
+          <p:cNvPr id="3" name="Content Placeholder 2">
+            <a:extLst>
+              <a:ext uri="{FF2B5EF4-FFF2-40B4-BE49-F238E27FC236}">
+                <a16:creationId xmlns:a16="http://schemas.microsoft.com/office/drawing/2014/main" id="{1DDF167B-293F-D7FF-DBEA-BE77BAA889D9}"/>
+              </a:ext>
+            </a:extLst>
+          </p:cNvPr>
+          <p:cNvSpPr>
+            <a:spLocks noGrp="1"/>
+          </p:cNvSpPr>
+          <p:nvPr>
+            <p:ph idx="1"/>
+          </p:nvPr>
+        </p:nvSpPr>
+        <p:spPr/>
+        <p:txBody>
+          <a:bodyPr>
+            <a:normAutofit fontScale="92500" lnSpcReduction="20000"/>
+          </a:bodyPr>
+          <a:lstStyle/>
+          <a:p>
+            <a:r>
+              <a:rPr lang="en-US" dirty="0"/>
+              <a:t>ASCII character: 1-byte (</a:t>
+            </a:r>
+            <a:r>
+              <a:rPr lang="en-US" dirty="0" err="1"/>
+              <a:t>msb</a:t>
+            </a:r>
+            <a:r>
+              <a:rPr lang="en-US" dirty="0"/>
+              <a:t>=0)</a:t>
+            </a:r>
+          </a:p>
+          <a:p>
+            <a:pPr lvl="1"/>
+            <a:r>
+              <a:rPr lang="en-US" dirty="0"/>
+              <a:t>ASCII table maps [0,127] </a:t>
+            </a:r>
+            <a:r>
+              <a:rPr lang="en-US" dirty="0">
+                <a:sym typeface="Wingdings" pitchFamily="2" charset="2"/>
+              </a:rPr>
+              <a:t></a:t>
+            </a:r>
+            <a:r>
+              <a:rPr lang="en-US" dirty="0"/>
+              <a:t> keyboard characters </a:t>
+            </a:r>
+          </a:p>
+          <a:p>
+            <a:pPr lvl="1"/>
+            <a:endParaRPr lang="en-US" dirty="0"/>
+          </a:p>
+          <a:p>
+            <a:pPr lvl="1"/>
+            <a:endParaRPr lang="en-US" dirty="0"/>
+          </a:p>
+          <a:p>
+            <a:pPr lvl="1"/>
+            <a:endParaRPr lang="en-US" dirty="0"/>
+          </a:p>
+          <a:p>
+            <a:pPr lvl="1"/>
+            <a:endParaRPr lang="en-US" dirty="0"/>
+          </a:p>
+          <a:p>
+            <a:pPr lvl="1"/>
+            <a:endParaRPr lang="en-US" dirty="0"/>
+          </a:p>
+          <a:p>
+            <a:pPr lvl="1"/>
+            <a:endParaRPr lang="en-US" dirty="0"/>
+          </a:p>
+          <a:p>
+            <a:pPr lvl="1"/>
+            <a:endParaRPr lang="en-US" dirty="0"/>
+          </a:p>
+          <a:p>
+            <a:r>
+              <a:rPr lang="en-US" dirty="0"/>
+              <a:t>C string</a:t>
+            </a:r>
+          </a:p>
+          <a:p>
+            <a:pPr lvl="1"/>
+            <a:r>
+              <a:rPr lang="en-US" dirty="0"/>
+              <a:t>Character array with a terminating NULL character</a:t>
+            </a:r>
+          </a:p>
+        </p:txBody>
+      </p:sp>
+      <p:grpSp>
+        <p:nvGrpSpPr>
+          <p:cNvPr id="11" name="Group 10">
+            <a:extLst>
+              <a:ext uri="{FF2B5EF4-FFF2-40B4-BE49-F238E27FC236}">
+                <a16:creationId xmlns:a16="http://schemas.microsoft.com/office/drawing/2014/main" id="{7B8BC976-E3DF-8549-24FB-1AC699565478}"/>
+              </a:ext>
+            </a:extLst>
+          </p:cNvPr>
+          <p:cNvGrpSpPr/>
+          <p:nvPr/>
+        </p:nvGrpSpPr>
+        <p:grpSpPr>
+          <a:xfrm>
+            <a:off x="879260" y="2885037"/>
+            <a:ext cx="1687670" cy="2110524"/>
+            <a:chOff x="2884330" y="2648168"/>
+            <a:chExt cx="1687670" cy="2110524"/>
+          </a:xfrm>
+        </p:grpSpPr>
+        <p:pic>
+          <p:nvPicPr>
+            <p:cNvPr id="5" name="Picture 4">
+              <a:extLst>
+                <a:ext uri="{FF2B5EF4-FFF2-40B4-BE49-F238E27FC236}">
+                  <a16:creationId xmlns:a16="http://schemas.microsoft.com/office/drawing/2014/main" id="{DD5D4F9D-7EEF-7E75-AA58-E9B13FDB61F8}"/>
+                </a:ext>
+              </a:extLst>
+            </p:cNvPr>
+            <p:cNvPicPr>
+              <a:picLocks noChangeAspect="1"/>
+            </p:cNvPicPr>
+            <p:nvPr/>
+          </p:nvPicPr>
+          <p:blipFill>
+            <a:blip r:embed="rId2"/>
+            <a:stretch>
+              <a:fillRect/>
+            </a:stretch>
+          </p:blipFill>
+          <p:spPr>
+            <a:xfrm>
+              <a:off x="2884330" y="2997092"/>
+              <a:ext cx="1687670" cy="1479082"/>
+            </a:xfrm>
+            <a:prstGeom prst="rect">
+              <a:avLst/>
+            </a:prstGeom>
+          </p:spPr>
+        </p:pic>
+        <p:pic>
+          <p:nvPicPr>
+            <p:cNvPr id="8" name="Picture 7">
+              <a:extLst>
+                <a:ext uri="{FF2B5EF4-FFF2-40B4-BE49-F238E27FC236}">
+                  <a16:creationId xmlns:a16="http://schemas.microsoft.com/office/drawing/2014/main" id="{F72690D3-D3C7-2ACD-2E8E-F23B1C6CEDC2}"/>
+                </a:ext>
+              </a:extLst>
+            </p:cNvPr>
+            <p:cNvPicPr>
+              <a:picLocks noChangeAspect="1"/>
+            </p:cNvPicPr>
+            <p:nvPr/>
+          </p:nvPicPr>
+          <p:blipFill>
+            <a:blip r:embed="rId3"/>
+            <a:stretch>
+              <a:fillRect/>
+            </a:stretch>
+          </p:blipFill>
+          <p:spPr>
+            <a:xfrm>
+              <a:off x="2961448" y="2648168"/>
+              <a:ext cx="1357164" cy="166362"/>
+            </a:xfrm>
+            <a:prstGeom prst="rect">
+              <a:avLst/>
+            </a:prstGeom>
+          </p:spPr>
+        </p:pic>
+        <p:sp>
+          <p:nvSpPr>
+            <p:cNvPr id="9" name="TextBox 8">
+              <a:extLst>
+                <a:ext uri="{FF2B5EF4-FFF2-40B4-BE49-F238E27FC236}">
+                  <a16:creationId xmlns:a16="http://schemas.microsoft.com/office/drawing/2014/main" id="{FA66F4CC-60D8-38C3-7838-2C599C7AEF8B}"/>
+                </a:ext>
+              </a:extLst>
+            </p:cNvPr>
+            <p:cNvSpPr txBox="1"/>
+            <p:nvPr/>
+          </p:nvSpPr>
+          <p:spPr>
+            <a:xfrm>
+              <a:off x="3490367" y="2684692"/>
+              <a:ext cx="431528" cy="338554"/>
+            </a:xfrm>
+            <a:prstGeom prst="rect">
+              <a:avLst/>
+            </a:prstGeom>
+            <a:noFill/>
+          </p:spPr>
+          <p:txBody>
+            <a:bodyPr wrap="none" rtlCol="0">
+              <a:spAutoFit/>
+            </a:bodyPr>
+            <a:lstStyle/>
+            <a:p>
+              <a:r>
+                <a:rPr lang="en-US" sz="1600" dirty="0"/>
+                <a:t>. . .</a:t>
+              </a:r>
+            </a:p>
+          </p:txBody>
+        </p:sp>
+        <p:sp>
+          <p:nvSpPr>
+            <p:cNvPr id="10" name="TextBox 9">
+              <a:extLst>
+                <a:ext uri="{FF2B5EF4-FFF2-40B4-BE49-F238E27FC236}">
+                  <a16:creationId xmlns:a16="http://schemas.microsoft.com/office/drawing/2014/main" id="{98B78C41-E1B0-BD14-56E3-CB07E926B4BE}"/>
+                </a:ext>
+              </a:extLst>
+            </p:cNvPr>
+            <p:cNvSpPr txBox="1"/>
+            <p:nvPr/>
+          </p:nvSpPr>
+          <p:spPr>
+            <a:xfrm>
+              <a:off x="3424266" y="4420138"/>
+              <a:ext cx="431528" cy="338554"/>
+            </a:xfrm>
+            <a:prstGeom prst="rect">
+              <a:avLst/>
+            </a:prstGeom>
+            <a:noFill/>
+          </p:spPr>
+          <p:txBody>
+            <a:bodyPr wrap="none" rtlCol="0">
+              <a:spAutoFit/>
+            </a:bodyPr>
+            <a:lstStyle/>
+            <a:p>
+              <a:r>
+                <a:rPr lang="en-US" sz="1600" dirty="0"/>
+                <a:t>. . .</a:t>
+              </a:r>
+            </a:p>
+          </p:txBody>
+        </p:sp>
+      </p:grpSp>
+    </p:spTree>
+    <p:extLst>
+      <p:ext uri="{BB962C8B-B14F-4D97-AF65-F5344CB8AC3E}">
+        <p14:creationId xmlns:p14="http://schemas.microsoft.com/office/powerpoint/2010/main" val="3128739436"/>
+      </p:ext>
+    </p:extLst>
+  </p:cSld>
+  <p:clrMapOvr>
+    <a:masterClrMapping/>
+  </p:clrMapOvr>
+</p:sld>
+</file>
+
+<file path=ppt/slides/slide62.xml><?xml version="1.0" encoding="utf-8"?>
+<p:sld xmlns:a="http://schemas.openxmlformats.org/drawingml/2006/main" xmlns:r="http://schemas.openxmlformats.org/officeDocument/2006/relationships" xmlns:p="http://schemas.openxmlformats.org/presentationml/2006/main">
+  <p:cSld>
+    <p:spTree>
+      <p:nvGrpSpPr>
+        <p:cNvPr id="1" name=""/>
+        <p:cNvGrpSpPr/>
+        <p:nvPr/>
+      </p:nvGrpSpPr>
+      <p:grpSpPr>
+        <a:xfrm>
+          <a:off x="0" y="0"/>
+          <a:ext cx="0" cy="0"/>
+          <a:chOff x="0" y="0"/>
+          <a:chExt cx="0" cy="0"/>
+        </a:xfrm>
+      </p:grpSpPr>
+      <p:sp>
+        <p:nvSpPr>
           <p:cNvPr id="2" name="Title 1"/>
           <p:cNvSpPr>
             <a:spLocks noGrp="1"/>
@@ -32018,7 +32324,7 @@
 </p:sld>
 </file>
 
-<file path=ppt/slides/slide62.xml><?xml version="1.0" encoding="utf-8"?>
+<file path=ppt/slides/slide63.xml><?xml version="1.0" encoding="utf-8"?>
 <p:sld xmlns:a="http://schemas.openxmlformats.org/drawingml/2006/main" xmlns:r="http://schemas.openxmlformats.org/officeDocument/2006/relationships" xmlns:p="http://schemas.openxmlformats.org/presentationml/2006/main">
   <p:cSld>
     <p:spTree>
@@ -33221,7 +33527,7 @@
 </p:sld>
 </file>
 
-<file path=ppt/slides/slide63.xml><?xml version="1.0" encoding="utf-8"?>
+<file path=ppt/slides/slide64.xml><?xml version="1.0" encoding="utf-8"?>
 <p:sld xmlns:a="http://schemas.openxmlformats.org/drawingml/2006/main" xmlns:r="http://schemas.openxmlformats.org/officeDocument/2006/relationships" xmlns:p="http://schemas.openxmlformats.org/presentationml/2006/main">
   <p:cSld>
     <p:spTree>
@@ -33541,7 +33847,7 @@
 </p:sld>
 </file>
 
-<file path=ppt/slides/slide64.xml><?xml version="1.0" encoding="utf-8"?>
+<file path=ppt/slides/slide65.xml><?xml version="1.0" encoding="utf-8"?>
 <p:sld xmlns:a="http://schemas.openxmlformats.org/drawingml/2006/main" xmlns:r="http://schemas.openxmlformats.org/officeDocument/2006/relationships" xmlns:p="http://schemas.openxmlformats.org/presentationml/2006/main">
   <p:cSld>
     <p:spTree>
@@ -34509,7 +34815,7 @@
 </p:sld>
 </file>
 
-<file path=ppt/slides/slide65.xml><?xml version="1.0" encoding="utf-8"?>
+<file path=ppt/slides/slide66.xml><?xml version="1.0" encoding="utf-8"?>
 <p:sld xmlns:a="http://schemas.openxmlformats.org/drawingml/2006/main" xmlns:r="http://schemas.openxmlformats.org/officeDocument/2006/relationships" xmlns:p="http://schemas.openxmlformats.org/presentationml/2006/main">
   <p:cSld>
     <p:spTree>
@@ -35727,7 +36033,7 @@
 </p:sld>
 </file>
 
-<file path=ppt/slides/slide66.xml><?xml version="1.0" encoding="utf-8"?>
+<file path=ppt/slides/slide67.xml><?xml version="1.0" encoding="utf-8"?>
 <p:sld xmlns:a="http://schemas.openxmlformats.org/drawingml/2006/main" xmlns:r="http://schemas.openxmlformats.org/officeDocument/2006/relationships" xmlns:p="http://schemas.openxmlformats.org/presentationml/2006/main">
   <p:cSld>
     <p:spTree>
